--- a/slides/aigw-course.pptx
+++ b/slides/aigw-course.pptx
@@ -6660,7 +6660,7 @@
                 <a:ea typeface="微軟正黑體" pitchFamily="34" charset="-122"/>
                 <a:cs typeface="微軟正黑體" pitchFamily="34" charset="-120"/>
               </a:rPr>
-              <a:t>感謝參與本次課程！</a:t>
+              <a:t>感謝參與</a:t>
             </a:r>
             <a:endParaRPr lang="en-US" sz="1800" dirty="0"/>
           </a:p>
@@ -6699,9 +6699,501 @@
                 <a:ea typeface="微軟正黑體" pitchFamily="34" charset="-122"/>
                 <a:cs typeface="微軟正黑體" pitchFamily="34" charset="-120"/>
               </a:rPr>
-              <a:t>Repo 在 github.com/victor80122/cloudflare-aigw-course</a:t>
+              <a:t>Thank You</a:t>
             </a:r>
             <a:endParaRPr lang="en-US" sz="2400" dirty="0"/>
+          </a:p>
+        </p:txBody>
+      </p:sp>
+      <p:sp>
+        <p:nvSpPr>
+          <p:cNvPr id="5" name="Text 3"/>
+          <p:cNvSpPr/>
+          <p:nvPr/>
+        </p:nvSpPr>
+        <p:spPr>
+          <a:xfrm>
+            <a:off x="457200" y="3200400"/>
+            <a:ext cx="365760" cy="365760"/>
+          </a:xfrm>
+          <a:prstGeom prst="rect">
+            <a:avLst/>
+          </a:prstGeom>
+          <a:noFill/>
+          <a:ln/>
+        </p:spPr>
+        <p:txBody>
+          <a:bodyPr wrap="square" rtlCol="0" anchor="ctr"/>
+          <a:lstStyle/>
+          <a:p>
+            <a:pPr indent="0" marL="0">
+              <a:buNone/>
+            </a:pPr>
+            <a:r>
+              <a:rPr lang="en-US" sz="1600" dirty="0">
+                <a:solidFill>
+                  <a:srgbClr val="FFFFFF"/>
+                </a:solidFill>
+                <a:latin typeface="微軟正黑體" pitchFamily="34" charset="0"/>
+                <a:ea typeface="微軟正黑體" pitchFamily="34" charset="-122"/>
+                <a:cs typeface="微軟正黑體" pitchFamily="34" charset="-120"/>
+              </a:rPr>
+              <a:t>☎</a:t>
+            </a:r>
+            <a:endParaRPr lang="en-US" sz="1600" dirty="0"/>
+          </a:p>
+        </p:txBody>
+      </p:sp>
+      <p:sp>
+        <p:nvSpPr>
+          <p:cNvPr id="6" name="Text 4"/>
+          <p:cNvSpPr/>
+          <p:nvPr/>
+        </p:nvSpPr>
+        <p:spPr>
+          <a:xfrm>
+            <a:off x="914400" y="3200400"/>
+            <a:ext cx="3200400" cy="365760"/>
+          </a:xfrm>
+          <a:prstGeom prst="rect">
+            <a:avLst/>
+          </a:prstGeom>
+          <a:noFill/>
+          <a:ln/>
+        </p:spPr>
+        <p:txBody>
+          <a:bodyPr wrap="square" rtlCol="0" anchor="ctr"/>
+          <a:lstStyle/>
+          <a:p>
+            <a:pPr indent="0" marL="0">
+              <a:buNone/>
+            </a:pPr>
+            <a:r>
+              <a:rPr lang="en-US" sz="1400" dirty="0">
+                <a:solidFill>
+                  <a:srgbClr val="FFFFFF"/>
+                </a:solidFill>
+                <a:latin typeface="微軟正黑體" pitchFamily="34" charset="0"/>
+                <a:ea typeface="微軟正黑體" pitchFamily="34" charset="-122"/>
+                <a:cs typeface="微軟正黑體" pitchFamily="34" charset="-120"/>
+              </a:rPr>
+              <a:t>+886-2-77220055</a:t>
+            </a:r>
+            <a:endParaRPr lang="en-US" sz="1400" dirty="0"/>
+          </a:p>
+        </p:txBody>
+      </p:sp>
+      <p:sp>
+        <p:nvSpPr>
+          <p:cNvPr id="7" name="Text 5"/>
+          <p:cNvSpPr/>
+          <p:nvPr/>
+        </p:nvSpPr>
+        <p:spPr>
+          <a:xfrm>
+            <a:off x="457200" y="3703320"/>
+            <a:ext cx="365760" cy="365760"/>
+          </a:xfrm>
+          <a:prstGeom prst="rect">
+            <a:avLst/>
+          </a:prstGeom>
+          <a:noFill/>
+          <a:ln/>
+        </p:spPr>
+        <p:txBody>
+          <a:bodyPr wrap="square" rtlCol="0" anchor="ctr"/>
+          <a:lstStyle/>
+          <a:p>
+            <a:pPr indent="0" marL="0">
+              <a:buNone/>
+            </a:pPr>
+            <a:r>
+              <a:rPr lang="en-US" sz="1600" dirty="0">
+                <a:solidFill>
+                  <a:srgbClr val="FFFFFF"/>
+                </a:solidFill>
+                <a:latin typeface="微軟正黑體" pitchFamily="34" charset="0"/>
+                <a:ea typeface="微軟正黑體" pitchFamily="34" charset="-122"/>
+                <a:cs typeface="微軟正黑體" pitchFamily="34" charset="-120"/>
+              </a:rPr>
+              <a:t>🌐</a:t>
+            </a:r>
+            <a:endParaRPr lang="en-US" sz="1600" dirty="0"/>
+          </a:p>
+        </p:txBody>
+      </p:sp>
+      <p:sp>
+        <p:nvSpPr>
+          <p:cNvPr id="8" name="Text 6"/>
+          <p:cNvSpPr/>
+          <p:nvPr/>
+        </p:nvSpPr>
+        <p:spPr>
+          <a:xfrm>
+            <a:off x="914400" y="3703320"/>
+            <a:ext cx="3200400" cy="365760"/>
+          </a:xfrm>
+          <a:prstGeom prst="rect">
+            <a:avLst/>
+          </a:prstGeom>
+          <a:noFill/>
+          <a:ln/>
+        </p:spPr>
+        <p:txBody>
+          <a:bodyPr wrap="square" rtlCol="0" anchor="ctr"/>
+          <a:lstStyle/>
+          <a:p>
+            <a:pPr indent="0" marL="0">
+              <a:buNone/>
+            </a:pPr>
+            <a:r>
+              <a:rPr lang="en-US" sz="1400" dirty="0">
+                <a:solidFill>
+                  <a:srgbClr val="FFFFFF"/>
+                </a:solidFill>
+                <a:latin typeface="微軟正黑體" pitchFamily="34" charset="0"/>
+                <a:ea typeface="微軟正黑體" pitchFamily="34" charset="-122"/>
+                <a:cs typeface="微軟正黑體" pitchFamily="34" charset="-120"/>
+              </a:rPr>
+              <a:t>www.leyun.cloud</a:t>
+            </a:r>
+            <a:endParaRPr lang="en-US" sz="1400" dirty="0"/>
+          </a:p>
+        </p:txBody>
+      </p:sp>
+      <p:sp>
+        <p:nvSpPr>
+          <p:cNvPr id="9" name="Text 7"/>
+          <p:cNvSpPr/>
+          <p:nvPr/>
+        </p:nvSpPr>
+        <p:spPr>
+          <a:xfrm>
+            <a:off x="457200" y="4206240"/>
+            <a:ext cx="365760" cy="365760"/>
+          </a:xfrm>
+          <a:prstGeom prst="rect">
+            <a:avLst/>
+          </a:prstGeom>
+          <a:noFill/>
+          <a:ln/>
+        </p:spPr>
+        <p:txBody>
+          <a:bodyPr wrap="square" rtlCol="0" anchor="ctr"/>
+          <a:lstStyle/>
+          <a:p>
+            <a:pPr indent="0" marL="0">
+              <a:buNone/>
+            </a:pPr>
+            <a:r>
+              <a:rPr lang="en-US" sz="1600" dirty="0">
+                <a:solidFill>
+                  <a:srgbClr val="FFFFFF"/>
+                </a:solidFill>
+                <a:latin typeface="微軟正黑體" pitchFamily="34" charset="0"/>
+                <a:ea typeface="微軟正黑體" pitchFamily="34" charset="-122"/>
+                <a:cs typeface="微軟正黑體" pitchFamily="34" charset="-120"/>
+              </a:rPr>
+              <a:t>✉</a:t>
+            </a:r>
+            <a:endParaRPr lang="en-US" sz="1600" dirty="0"/>
+          </a:p>
+        </p:txBody>
+      </p:sp>
+      <p:sp>
+        <p:nvSpPr>
+          <p:cNvPr id="10" name="Text 8"/>
+          <p:cNvSpPr/>
+          <p:nvPr/>
+        </p:nvSpPr>
+        <p:spPr>
+          <a:xfrm>
+            <a:off x="914400" y="4206240"/>
+            <a:ext cx="3200400" cy="365760"/>
+          </a:xfrm>
+          <a:prstGeom prst="rect">
+            <a:avLst/>
+          </a:prstGeom>
+          <a:noFill/>
+          <a:ln/>
+        </p:spPr>
+        <p:txBody>
+          <a:bodyPr wrap="square" rtlCol="0" anchor="ctr"/>
+          <a:lstStyle/>
+          <a:p>
+            <a:pPr indent="0" marL="0">
+              <a:buNone/>
+            </a:pPr>
+            <a:r>
+              <a:rPr lang="en-US" sz="1400" dirty="0">
+                <a:solidFill>
+                  <a:srgbClr val="FFFFFF"/>
+                </a:solidFill>
+                <a:latin typeface="微軟正黑體" pitchFamily="34" charset="0"/>
+                <a:ea typeface="微軟正黑體" pitchFamily="34" charset="-122"/>
+                <a:cs typeface="微軟正黑體" pitchFamily="34" charset="-120"/>
+              </a:rPr>
+              <a:t>victor@leyun.com.tw</a:t>
+            </a:r>
+            <a:endParaRPr lang="en-US" sz="1400" dirty="0"/>
+          </a:p>
+        </p:txBody>
+      </p:sp>
+      <p:sp>
+        <p:nvSpPr>
+          <p:cNvPr id="11" name="Text 9"/>
+          <p:cNvSpPr/>
+          <p:nvPr/>
+        </p:nvSpPr>
+        <p:spPr>
+          <a:xfrm>
+            <a:off x="5029200" y="1554480"/>
+            <a:ext cx="6675120" cy="292608"/>
+          </a:xfrm>
+          <a:prstGeom prst="rect">
+            <a:avLst/>
+          </a:prstGeom>
+          <a:noFill/>
+          <a:ln/>
+        </p:spPr>
+        <p:txBody>
+          <a:bodyPr wrap="square" rtlCol="0" anchor="ctr"/>
+          <a:lstStyle/>
+          <a:p>
+            <a:pPr indent="0" marL="0">
+              <a:buNone/>
+            </a:pPr>
+            <a:r>
+              <a:rPr lang="en-US" sz="1100" dirty="0">
+                <a:solidFill>
+                  <a:srgbClr val="888888"/>
+                </a:solidFill>
+                <a:latin typeface="微軟正黑體" pitchFamily="34" charset="0"/>
+                <a:ea typeface="微軟正黑體" pitchFamily="34" charset="-122"/>
+                <a:cs typeface="微軟正黑體" pitchFamily="34" charset="-120"/>
+              </a:rPr>
+              <a:t>Cloudflare AI Gateway 實戰 · 樂雲智能 LEYUN</a:t>
+            </a:r>
+            <a:endParaRPr lang="en-US" sz="1100" dirty="0"/>
+          </a:p>
+        </p:txBody>
+      </p:sp>
+      <p:sp>
+        <p:nvSpPr>
+          <p:cNvPr id="12" name="Shape 10"/>
+          <p:cNvSpPr/>
+          <p:nvPr/>
+        </p:nvSpPr>
+        <p:spPr>
+          <a:xfrm>
+            <a:off x="5029200" y="2011680"/>
+            <a:ext cx="91440" cy="1828800"/>
+          </a:xfrm>
+          <a:prstGeom prst="rect">
+            <a:avLst/>
+          </a:prstGeom>
+          <a:solidFill>
+            <a:srgbClr val="F38020"/>
+          </a:solidFill>
+          <a:ln/>
+        </p:spPr>
+      </p:sp>
+      <p:sp>
+        <p:nvSpPr>
+          <p:cNvPr id="13" name="Text 11"/>
+          <p:cNvSpPr/>
+          <p:nvPr/>
+        </p:nvSpPr>
+        <p:spPr>
+          <a:xfrm>
+            <a:off x="5257800" y="2011680"/>
+            <a:ext cx="6492240" cy="1828800"/>
+          </a:xfrm>
+          <a:prstGeom prst="rect">
+            <a:avLst/>
+          </a:prstGeom>
+          <a:noFill/>
+          <a:ln/>
+        </p:spPr>
+        <p:txBody>
+          <a:bodyPr wrap="square" rtlCol="0" anchor="ctr"/>
+          <a:lstStyle/>
+          <a:p>
+            <a:pPr indent="0" marL="0">
+              <a:lnSpc>
+                <a:spcPct val="115000"/>
+              </a:lnSpc>
+              <a:buNone/>
+            </a:pPr>
+            <a:r>
+              <a:rPr lang="en-US" sz="2800" b="1" dirty="0">
+                <a:solidFill>
+                  <a:srgbClr val="1A1A1A"/>
+                </a:solidFill>
+                <a:latin typeface="微軟正黑體" pitchFamily="34" charset="0"/>
+                <a:ea typeface="微軟正黑體" pitchFamily="34" charset="-122"/>
+                <a:cs typeface="微軟正黑體" pitchFamily="34" charset="-120"/>
+              </a:rPr>
+              <a:t>帶走 Repo</a:t>
+            </a:r>
+            <a:endParaRPr lang="en-US" sz="2800" dirty="0"/>
+          </a:p>
+          <a:p>
+            <a:pPr indent="0" marL="0">
+              <a:lnSpc>
+                <a:spcPct val="115000"/>
+              </a:lnSpc>
+              <a:buNone/>
+            </a:pPr>
+            <a:r>
+              <a:rPr lang="en-US" sz="2800" b="1" dirty="0">
+                <a:solidFill>
+                  <a:srgbClr val="1A1A1A"/>
+                </a:solidFill>
+                <a:latin typeface="微軟正黑體" pitchFamily="34" charset="0"/>
+                <a:ea typeface="微軟正黑體" pitchFamily="34" charset="-122"/>
+                <a:cs typeface="微軟正黑體" pitchFamily="34" charset="-120"/>
+              </a:rPr>
+              <a:t>持續延伸學習</a:t>
+            </a:r>
+            <a:endParaRPr lang="en-US" sz="2800" dirty="0"/>
+          </a:p>
+        </p:txBody>
+      </p:sp>
+      <p:sp>
+        <p:nvSpPr>
+          <p:cNvPr id="14" name="Text 12"/>
+          <p:cNvSpPr/>
+          <p:nvPr/>
+        </p:nvSpPr>
+        <p:spPr>
+          <a:xfrm>
+            <a:off x="5257800" y="3913632"/>
+            <a:ext cx="6492240" cy="457200"/>
+          </a:xfrm>
+          <a:prstGeom prst="rect">
+            <a:avLst/>
+          </a:prstGeom>
+          <a:noFill/>
+          <a:ln/>
+        </p:spPr>
+        <p:txBody>
+          <a:bodyPr wrap="square" rtlCol="0" anchor="ctr"/>
+          <a:lstStyle/>
+          <a:p>
+            <a:pPr indent="0" marL="0">
+              <a:buNone/>
+            </a:pPr>
+            <a:r>
+              <a:rPr lang="en-US" sz="1500" i="1" dirty="0">
+                <a:solidFill>
+                  <a:srgbClr val="444444"/>
+                </a:solidFill>
+                <a:latin typeface="微軟正黑體" pitchFamily="34" charset="0"/>
+                <a:ea typeface="微軟正黑體" pitchFamily="34" charset="-122"/>
+                <a:cs typeface="微軟正黑體" pitchFamily="34" charset="-120"/>
+              </a:rPr>
+              <a:t>README · QUICK-START · COURSE-OUTLINE · cheatsheet 一應俱全</a:t>
+            </a:r>
+            <a:endParaRPr lang="en-US" sz="1500" dirty="0"/>
+          </a:p>
+        </p:txBody>
+      </p:sp>
+      <p:sp>
+        <p:nvSpPr>
+          <p:cNvPr id="15" name="Shape 13"/>
+          <p:cNvSpPr/>
+          <p:nvPr/>
+        </p:nvSpPr>
+        <p:spPr>
+          <a:xfrm>
+            <a:off x="5029200" y="4617720"/>
+            <a:ext cx="64008" cy="384048"/>
+          </a:xfrm>
+          <a:prstGeom prst="rect">
+            <a:avLst/>
+          </a:prstGeom>
+          <a:solidFill>
+            <a:srgbClr val="F38020"/>
+          </a:solidFill>
+          <a:ln/>
+        </p:spPr>
+      </p:sp>
+      <p:sp>
+        <p:nvSpPr>
+          <p:cNvPr id="16" name="Text 14"/>
+          <p:cNvSpPr/>
+          <p:nvPr/>
+        </p:nvSpPr>
+        <p:spPr>
+          <a:xfrm>
+            <a:off x="5212080" y="4617720"/>
+            <a:ext cx="6492240" cy="384048"/>
+          </a:xfrm>
+          <a:prstGeom prst="rect">
+            <a:avLst/>
+          </a:prstGeom>
+          <a:noFill/>
+          <a:ln/>
+        </p:spPr>
+        <p:txBody>
+          <a:bodyPr wrap="square" rtlCol="0" anchor="ctr"/>
+          <a:lstStyle/>
+          <a:p>
+            <a:pPr indent="0" marL="0">
+              <a:buNone/>
+            </a:pPr>
+            <a:r>
+              <a:rPr lang="en-US" sz="1400" b="1" dirty="0">
+                <a:solidFill>
+                  <a:srgbClr val="F38020"/>
+                </a:solidFill>
+                <a:latin typeface="微軟正黑體" pitchFamily="34" charset="0"/>
+                <a:ea typeface="微軟正黑體" pitchFamily="34" charset="-122"/>
+                <a:cs typeface="微軟正黑體" pitchFamily="34" charset="-120"/>
+              </a:rPr>
+              <a:t>NEXT STEP — 課後問題請來信或加入樂雲學員交流社群</a:t>
+            </a:r>
+            <a:endParaRPr lang="en-US" sz="1400" dirty="0"/>
+          </a:p>
+        </p:txBody>
+      </p:sp>
+      <p:sp>
+        <p:nvSpPr>
+          <p:cNvPr id="17" name="Text 15"/>
+          <p:cNvSpPr/>
+          <p:nvPr/>
+        </p:nvSpPr>
+        <p:spPr>
+          <a:xfrm>
+            <a:off x="5212080" y="5074920"/>
+            <a:ext cx="6492240" cy="320040"/>
+          </a:xfrm>
+          <a:prstGeom prst="rect">
+            <a:avLst/>
+          </a:prstGeom>
+          <a:noFill/>
+          <a:ln/>
+        </p:spPr>
+        <p:txBody>
+          <a:bodyPr wrap="square" rtlCol="0" anchor="ctr"/>
+          <a:lstStyle/>
+          <a:p>
+            <a:pPr indent="0" marL="0">
+              <a:buNone/>
+            </a:pPr>
+            <a:r>
+              <a:rPr lang="en-US" sz="1200" dirty="0">
+                <a:solidFill>
+                  <a:srgbClr val="888888"/>
+                </a:solidFill>
+                <a:latin typeface="微軟正黑體" pitchFamily="34" charset="0"/>
+                <a:ea typeface="微軟正黑體" pitchFamily="34" charset="-122"/>
+                <a:cs typeface="微軟正黑體" pitchFamily="34" charset="-120"/>
+              </a:rPr>
+              <a:t>提供 Basic / Advanced / Premium 三層商用方案，PoC 30 天免費試用</a:t>
+            </a:r>
+            <a:endParaRPr lang="en-US" sz="1200" dirty="0"/>
           </a:p>
         </p:txBody>
       </p:sp>
@@ -6938,6 +7430,890 @@
               <a:t>Cloudflare AI Gateway 實戰 · 樂雲課程 · 90 min</a:t>
             </a:r>
             <a:endParaRPr lang="en-US" sz="1000" dirty="0"/>
+          </a:p>
+        </p:txBody>
+      </p:sp>
+      <p:sp>
+        <p:nvSpPr>
+          <p:cNvPr id="8" name="Shape 5"/>
+          <p:cNvSpPr/>
+          <p:nvPr/>
+        </p:nvSpPr>
+        <p:spPr>
+          <a:xfrm>
+            <a:off x="457200" y="1325880"/>
+            <a:ext cx="5554980" cy="2455164"/>
+          </a:xfrm>
+          <a:prstGeom prst="rect">
+            <a:avLst/>
+          </a:prstGeom>
+          <a:solidFill>
+            <a:srgbClr val="FAFBFC"/>
+          </a:solidFill>
+          <a:ln w="12700">
+            <a:solidFill>
+              <a:srgbClr val="E5E7EB"/>
+            </a:solidFill>
+            <a:prstDash val="solid"/>
+          </a:ln>
+        </p:spPr>
+      </p:sp>
+      <p:sp>
+        <p:nvSpPr>
+          <p:cNvPr id="9" name="Shape 6"/>
+          <p:cNvSpPr/>
+          <p:nvPr/>
+        </p:nvSpPr>
+        <p:spPr>
+          <a:xfrm>
+            <a:off x="457200" y="1325880"/>
+            <a:ext cx="64008" cy="2455164"/>
+          </a:xfrm>
+          <a:prstGeom prst="rect">
+            <a:avLst/>
+          </a:prstGeom>
+          <a:solidFill>
+            <a:srgbClr val="F38020"/>
+          </a:solidFill>
+          <a:ln/>
+        </p:spPr>
+      </p:sp>
+      <p:sp>
+        <p:nvSpPr>
+          <p:cNvPr id="10" name="Shape 7"/>
+          <p:cNvSpPr/>
+          <p:nvPr/>
+        </p:nvSpPr>
+        <p:spPr>
+          <a:xfrm>
+            <a:off x="621792" y="2361438"/>
+            <a:ext cx="384048" cy="384048"/>
+          </a:xfrm>
+          <a:prstGeom prst="ellipse">
+            <a:avLst/>
+          </a:prstGeom>
+          <a:solidFill>
+            <a:srgbClr val="F38020"/>
+          </a:solidFill>
+          <a:ln/>
+        </p:spPr>
+      </p:sp>
+      <p:sp>
+        <p:nvSpPr>
+          <p:cNvPr id="11" name="Text 8"/>
+          <p:cNvSpPr/>
+          <p:nvPr/>
+        </p:nvSpPr>
+        <p:spPr>
+          <a:xfrm>
+            <a:off x="621792" y="2361438"/>
+            <a:ext cx="384048" cy="384048"/>
+          </a:xfrm>
+          <a:prstGeom prst="rect">
+            <a:avLst/>
+          </a:prstGeom>
+          <a:noFill/>
+          <a:ln/>
+        </p:spPr>
+        <p:txBody>
+          <a:bodyPr wrap="square" rtlCol="0" anchor="ctr"/>
+          <a:lstStyle/>
+          <a:p>
+            <a:pPr algn="ctr" indent="0" marL="0">
+              <a:buNone/>
+            </a:pPr>
+            <a:r>
+              <a:rPr lang="en-US" sz="1400" b="1" dirty="0">
+                <a:solidFill>
+                  <a:srgbClr val="FFFFFF"/>
+                </a:solidFill>
+                <a:latin typeface="微軟正黑體" pitchFamily="34" charset="0"/>
+                <a:ea typeface="微軟正黑體" pitchFamily="34" charset="-122"/>
+                <a:cs typeface="微軟正黑體" pitchFamily="34" charset="-120"/>
+              </a:rPr>
+              <a:t>01</a:t>
+            </a:r>
+            <a:endParaRPr lang="en-US" sz="1400" dirty="0"/>
+          </a:p>
+        </p:txBody>
+      </p:sp>
+      <p:sp>
+        <p:nvSpPr>
+          <p:cNvPr id="12" name="Text 9"/>
+          <p:cNvSpPr/>
+          <p:nvPr/>
+        </p:nvSpPr>
+        <p:spPr>
+          <a:xfrm>
+            <a:off x="1115568" y="2324862"/>
+            <a:ext cx="475488" cy="457200"/>
+          </a:xfrm>
+          <a:prstGeom prst="rect">
+            <a:avLst/>
+          </a:prstGeom>
+          <a:noFill/>
+          <a:ln/>
+        </p:spPr>
+        <p:txBody>
+          <a:bodyPr wrap="square" rtlCol="0" anchor="ctr"/>
+          <a:lstStyle/>
+          <a:p>
+            <a:pPr indent="0" marL="0">
+              <a:buNone/>
+            </a:pPr>
+            <a:r>
+              <a:rPr lang="en-US" sz="2000" dirty="0">
+                <a:solidFill>
+                  <a:srgbClr val="000000"/>
+                </a:solidFill>
+                <a:latin typeface="微軟正黑體" pitchFamily="34" charset="0"/>
+                <a:ea typeface="微軟正黑體" pitchFamily="34" charset="-122"/>
+                <a:cs typeface="微軟正黑體" pitchFamily="34" charset="-120"/>
+              </a:rPr>
+              <a:t>📘</a:t>
+            </a:r>
+            <a:endParaRPr lang="en-US" sz="2000" dirty="0"/>
+          </a:p>
+        </p:txBody>
+      </p:sp>
+      <p:sp>
+        <p:nvSpPr>
+          <p:cNvPr id="13" name="Text 10"/>
+          <p:cNvSpPr/>
+          <p:nvPr/>
+        </p:nvSpPr>
+        <p:spPr>
+          <a:xfrm>
+            <a:off x="1664208" y="1435608"/>
+            <a:ext cx="4229100" cy="1031169"/>
+          </a:xfrm>
+          <a:prstGeom prst="rect">
+            <a:avLst/>
+          </a:prstGeom>
+          <a:noFill/>
+          <a:ln/>
+        </p:spPr>
+        <p:txBody>
+          <a:bodyPr wrap="square" rtlCol="0" anchor="ctr"/>
+          <a:lstStyle/>
+          <a:p>
+            <a:pPr indent="0" marL="0">
+              <a:buNone/>
+            </a:pPr>
+            <a:r>
+              <a:rPr lang="en-US" sz="1400" b="1" dirty="0">
+                <a:solidFill>
+                  <a:srgbClr val="1A1A1A"/>
+                </a:solidFill>
+                <a:latin typeface="微軟正黑體" pitchFamily="34" charset="0"/>
+                <a:ea typeface="微軟正黑體" pitchFamily="34" charset="-122"/>
+                <a:cs typeface="微軟正黑體" pitchFamily="34" charset="-120"/>
+              </a:rPr>
+              <a:t>Cloudflare AI Gateway 概論</a:t>
+            </a:r>
+            <a:endParaRPr lang="en-US" sz="1400" dirty="0"/>
+          </a:p>
+        </p:txBody>
+      </p:sp>
+      <p:sp>
+        <p:nvSpPr>
+          <p:cNvPr id="14" name="Text 11"/>
+          <p:cNvSpPr/>
+          <p:nvPr/>
+        </p:nvSpPr>
+        <p:spPr>
+          <a:xfrm>
+            <a:off x="1664208" y="2504359"/>
+            <a:ext cx="4229100" cy="1104824"/>
+          </a:xfrm>
+          <a:prstGeom prst="rect">
+            <a:avLst/>
+          </a:prstGeom>
+          <a:noFill/>
+          <a:ln/>
+        </p:spPr>
+        <p:txBody>
+          <a:bodyPr wrap="square" rtlCol="0" anchor="t"/>
+          <a:lstStyle/>
+          <a:p>
+            <a:pPr indent="0" marL="0">
+              <a:buNone/>
+            </a:pPr>
+            <a:r>
+              <a:rPr lang="en-US" sz="1100" dirty="0">
+                <a:solidFill>
+                  <a:srgbClr val="444444"/>
+                </a:solidFill>
+                <a:latin typeface="微軟正黑體" pitchFamily="34" charset="0"/>
+                <a:ea typeface="微軟正黑體" pitchFamily="34" charset="-122"/>
+                <a:cs typeface="微軟正黑體" pitchFamily="34" charset="-120"/>
+              </a:rPr>
+              <a:t>15 min — 痛點 + 三大能力 + BYOK 機制</a:t>
+            </a:r>
+            <a:endParaRPr lang="en-US" sz="1100" dirty="0"/>
+          </a:p>
+        </p:txBody>
+      </p:sp>
+      <p:sp>
+        <p:nvSpPr>
+          <p:cNvPr id="15" name="Shape 12"/>
+          <p:cNvSpPr/>
+          <p:nvPr/>
+        </p:nvSpPr>
+        <p:spPr>
+          <a:xfrm>
+            <a:off x="6176772" y="1325880"/>
+            <a:ext cx="5554980" cy="2455164"/>
+          </a:xfrm>
+          <a:prstGeom prst="rect">
+            <a:avLst/>
+          </a:prstGeom>
+          <a:solidFill>
+            <a:srgbClr val="FAFBFC"/>
+          </a:solidFill>
+          <a:ln w="12700">
+            <a:solidFill>
+              <a:srgbClr val="E5E7EB"/>
+            </a:solidFill>
+            <a:prstDash val="solid"/>
+          </a:ln>
+        </p:spPr>
+      </p:sp>
+      <p:sp>
+        <p:nvSpPr>
+          <p:cNvPr id="16" name="Shape 13"/>
+          <p:cNvSpPr/>
+          <p:nvPr/>
+        </p:nvSpPr>
+        <p:spPr>
+          <a:xfrm>
+            <a:off x="6176772" y="1325880"/>
+            <a:ext cx="64008" cy="2455164"/>
+          </a:xfrm>
+          <a:prstGeom prst="rect">
+            <a:avLst/>
+          </a:prstGeom>
+          <a:solidFill>
+            <a:srgbClr val="F38020"/>
+          </a:solidFill>
+          <a:ln/>
+        </p:spPr>
+      </p:sp>
+      <p:sp>
+        <p:nvSpPr>
+          <p:cNvPr id="17" name="Shape 14"/>
+          <p:cNvSpPr/>
+          <p:nvPr/>
+        </p:nvSpPr>
+        <p:spPr>
+          <a:xfrm>
+            <a:off x="6341364" y="2361438"/>
+            <a:ext cx="384048" cy="384048"/>
+          </a:xfrm>
+          <a:prstGeom prst="ellipse">
+            <a:avLst/>
+          </a:prstGeom>
+          <a:solidFill>
+            <a:srgbClr val="F38020"/>
+          </a:solidFill>
+          <a:ln/>
+        </p:spPr>
+      </p:sp>
+      <p:sp>
+        <p:nvSpPr>
+          <p:cNvPr id="18" name="Text 15"/>
+          <p:cNvSpPr/>
+          <p:nvPr/>
+        </p:nvSpPr>
+        <p:spPr>
+          <a:xfrm>
+            <a:off x="6341364" y="2361438"/>
+            <a:ext cx="384048" cy="384048"/>
+          </a:xfrm>
+          <a:prstGeom prst="rect">
+            <a:avLst/>
+          </a:prstGeom>
+          <a:noFill/>
+          <a:ln/>
+        </p:spPr>
+        <p:txBody>
+          <a:bodyPr wrap="square" rtlCol="0" anchor="ctr"/>
+          <a:lstStyle/>
+          <a:p>
+            <a:pPr algn="ctr" indent="0" marL="0">
+              <a:buNone/>
+            </a:pPr>
+            <a:r>
+              <a:rPr lang="en-US" sz="1400" b="1" dirty="0">
+                <a:solidFill>
+                  <a:srgbClr val="FFFFFF"/>
+                </a:solidFill>
+                <a:latin typeface="微軟正黑體" pitchFamily="34" charset="0"/>
+                <a:ea typeface="微軟正黑體" pitchFamily="34" charset="-122"/>
+                <a:cs typeface="微軟正黑體" pitchFamily="34" charset="-120"/>
+              </a:rPr>
+              <a:t>02</a:t>
+            </a:r>
+            <a:endParaRPr lang="en-US" sz="1400" dirty="0"/>
+          </a:p>
+        </p:txBody>
+      </p:sp>
+      <p:sp>
+        <p:nvSpPr>
+          <p:cNvPr id="19" name="Text 16"/>
+          <p:cNvSpPr/>
+          <p:nvPr/>
+        </p:nvSpPr>
+        <p:spPr>
+          <a:xfrm>
+            <a:off x="6835140" y="2324862"/>
+            <a:ext cx="475488" cy="457200"/>
+          </a:xfrm>
+          <a:prstGeom prst="rect">
+            <a:avLst/>
+          </a:prstGeom>
+          <a:noFill/>
+          <a:ln/>
+        </p:spPr>
+        <p:txBody>
+          <a:bodyPr wrap="square" rtlCol="0" anchor="ctr"/>
+          <a:lstStyle/>
+          <a:p>
+            <a:pPr indent="0" marL="0">
+              <a:buNone/>
+            </a:pPr>
+            <a:r>
+              <a:rPr lang="en-US" sz="2000" dirty="0">
+                <a:solidFill>
+                  <a:srgbClr val="000000"/>
+                </a:solidFill>
+                <a:latin typeface="微軟正黑體" pitchFamily="34" charset="0"/>
+                <a:ea typeface="微軟正黑體" pitchFamily="34" charset="-122"/>
+                <a:cs typeface="微軟正黑體" pitchFamily="34" charset="-120"/>
+              </a:rPr>
+              <a:t>🔍</a:t>
+            </a:r>
+            <a:endParaRPr lang="en-US" sz="2000" dirty="0"/>
+          </a:p>
+        </p:txBody>
+      </p:sp>
+      <p:sp>
+        <p:nvSpPr>
+          <p:cNvPr id="20" name="Text 17"/>
+          <p:cNvSpPr/>
+          <p:nvPr/>
+        </p:nvSpPr>
+        <p:spPr>
+          <a:xfrm>
+            <a:off x="7383780" y="1435608"/>
+            <a:ext cx="4229100" cy="1031169"/>
+          </a:xfrm>
+          <a:prstGeom prst="rect">
+            <a:avLst/>
+          </a:prstGeom>
+          <a:noFill/>
+          <a:ln/>
+        </p:spPr>
+        <p:txBody>
+          <a:bodyPr wrap="square" rtlCol="0" anchor="ctr"/>
+          <a:lstStyle/>
+          <a:p>
+            <a:pPr indent="0" marL="0">
+              <a:buNone/>
+            </a:pPr>
+            <a:r>
+              <a:rPr lang="en-US" sz="1400" b="1" dirty="0">
+                <a:solidFill>
+                  <a:srgbClr val="1A1A1A"/>
+                </a:solidFill>
+                <a:latin typeface="微軟正黑體" pitchFamily="34" charset="0"/>
+                <a:ea typeface="微軟正黑體" pitchFamily="34" charset="-122"/>
+                <a:cs typeface="微軟正黑體" pitchFamily="34" charset="-120"/>
+              </a:rPr>
+              <a:t>實作專案架構導覽</a:t>
+            </a:r>
+            <a:endParaRPr lang="en-US" sz="1400" dirty="0"/>
+          </a:p>
+        </p:txBody>
+      </p:sp>
+      <p:sp>
+        <p:nvSpPr>
+          <p:cNvPr id="21" name="Text 18"/>
+          <p:cNvSpPr/>
+          <p:nvPr/>
+        </p:nvSpPr>
+        <p:spPr>
+          <a:xfrm>
+            <a:off x="7383780" y="2504359"/>
+            <a:ext cx="4229100" cy="1104824"/>
+          </a:xfrm>
+          <a:prstGeom prst="rect">
+            <a:avLst/>
+          </a:prstGeom>
+          <a:noFill/>
+          <a:ln/>
+        </p:spPr>
+        <p:txBody>
+          <a:bodyPr wrap="square" rtlCol="0" anchor="t"/>
+          <a:lstStyle/>
+          <a:p>
+            <a:pPr indent="0" marL="0">
+              <a:buNone/>
+            </a:pPr>
+            <a:r>
+              <a:rPr lang="en-US" sz="1100" dirty="0">
+                <a:solidFill>
+                  <a:srgbClr val="444444"/>
+                </a:solidFill>
+                <a:latin typeface="微軟正黑體" pitchFamily="34" charset="0"/>
+                <a:ea typeface="微軟正黑體" pitchFamily="34" charset="-122"/>
+                <a:cs typeface="微軟正黑體" pitchFamily="34" charset="-120"/>
+              </a:rPr>
+              <a:t>25 min — Code Walk 8 支 src + D1 schema</a:t>
+            </a:r>
+            <a:endParaRPr lang="en-US" sz="1100" dirty="0"/>
+          </a:p>
+        </p:txBody>
+      </p:sp>
+      <p:sp>
+        <p:nvSpPr>
+          <p:cNvPr id="22" name="Shape 19"/>
+          <p:cNvSpPr/>
+          <p:nvPr/>
+        </p:nvSpPr>
+        <p:spPr>
+          <a:xfrm>
+            <a:off x="457200" y="3945636"/>
+            <a:ext cx="5554980" cy="2455164"/>
+          </a:xfrm>
+          <a:prstGeom prst="rect">
+            <a:avLst/>
+          </a:prstGeom>
+          <a:solidFill>
+            <a:srgbClr val="FAFBFC"/>
+          </a:solidFill>
+          <a:ln w="12700">
+            <a:solidFill>
+              <a:srgbClr val="E5E7EB"/>
+            </a:solidFill>
+            <a:prstDash val="solid"/>
+          </a:ln>
+        </p:spPr>
+      </p:sp>
+      <p:sp>
+        <p:nvSpPr>
+          <p:cNvPr id="23" name="Shape 20"/>
+          <p:cNvSpPr/>
+          <p:nvPr/>
+        </p:nvSpPr>
+        <p:spPr>
+          <a:xfrm>
+            <a:off x="457200" y="3945636"/>
+            <a:ext cx="64008" cy="2455164"/>
+          </a:xfrm>
+          <a:prstGeom prst="rect">
+            <a:avLst/>
+          </a:prstGeom>
+          <a:solidFill>
+            <a:srgbClr val="F38020"/>
+          </a:solidFill>
+          <a:ln/>
+        </p:spPr>
+      </p:sp>
+      <p:sp>
+        <p:nvSpPr>
+          <p:cNvPr id="24" name="Shape 21"/>
+          <p:cNvSpPr/>
+          <p:nvPr/>
+        </p:nvSpPr>
+        <p:spPr>
+          <a:xfrm>
+            <a:off x="621792" y="4981194"/>
+            <a:ext cx="384048" cy="384048"/>
+          </a:xfrm>
+          <a:prstGeom prst="ellipse">
+            <a:avLst/>
+          </a:prstGeom>
+          <a:solidFill>
+            <a:srgbClr val="F38020"/>
+          </a:solidFill>
+          <a:ln/>
+        </p:spPr>
+      </p:sp>
+      <p:sp>
+        <p:nvSpPr>
+          <p:cNvPr id="25" name="Text 22"/>
+          <p:cNvSpPr/>
+          <p:nvPr/>
+        </p:nvSpPr>
+        <p:spPr>
+          <a:xfrm>
+            <a:off x="621792" y="4981194"/>
+            <a:ext cx="384048" cy="384048"/>
+          </a:xfrm>
+          <a:prstGeom prst="rect">
+            <a:avLst/>
+          </a:prstGeom>
+          <a:noFill/>
+          <a:ln/>
+        </p:spPr>
+        <p:txBody>
+          <a:bodyPr wrap="square" rtlCol="0" anchor="ctr"/>
+          <a:lstStyle/>
+          <a:p>
+            <a:pPr algn="ctr" indent="0" marL="0">
+              <a:buNone/>
+            </a:pPr>
+            <a:r>
+              <a:rPr lang="en-US" sz="1400" b="1" dirty="0">
+                <a:solidFill>
+                  <a:srgbClr val="FFFFFF"/>
+                </a:solidFill>
+                <a:latin typeface="微軟正黑體" pitchFamily="34" charset="0"/>
+                <a:ea typeface="微軟正黑體" pitchFamily="34" charset="-122"/>
+                <a:cs typeface="微軟正黑體" pitchFamily="34" charset="-120"/>
+              </a:rPr>
+              <a:t>03</a:t>
+            </a:r>
+            <a:endParaRPr lang="en-US" sz="1400" dirty="0"/>
+          </a:p>
+        </p:txBody>
+      </p:sp>
+      <p:sp>
+        <p:nvSpPr>
+          <p:cNvPr id="26" name="Text 23"/>
+          <p:cNvSpPr/>
+          <p:nvPr/>
+        </p:nvSpPr>
+        <p:spPr>
+          <a:xfrm>
+            <a:off x="1115568" y="4944618"/>
+            <a:ext cx="475488" cy="457200"/>
+          </a:xfrm>
+          <a:prstGeom prst="rect">
+            <a:avLst/>
+          </a:prstGeom>
+          <a:noFill/>
+          <a:ln/>
+        </p:spPr>
+        <p:txBody>
+          <a:bodyPr wrap="square" rtlCol="0" anchor="ctr"/>
+          <a:lstStyle/>
+          <a:p>
+            <a:pPr indent="0" marL="0">
+              <a:buNone/>
+            </a:pPr>
+            <a:r>
+              <a:rPr lang="en-US" sz="2000" dirty="0">
+                <a:solidFill>
+                  <a:srgbClr val="000000"/>
+                </a:solidFill>
+                <a:latin typeface="微軟正黑體" pitchFamily="34" charset="0"/>
+                <a:ea typeface="微軟正黑體" pitchFamily="34" charset="-122"/>
+                <a:cs typeface="微軟正黑體" pitchFamily="34" charset="-120"/>
+              </a:rPr>
+              <a:t>🛠</a:t>
+            </a:r>
+            <a:endParaRPr lang="en-US" sz="2000" dirty="0"/>
+          </a:p>
+        </p:txBody>
+      </p:sp>
+      <p:sp>
+        <p:nvSpPr>
+          <p:cNvPr id="27" name="Text 24"/>
+          <p:cNvSpPr/>
+          <p:nvPr/>
+        </p:nvSpPr>
+        <p:spPr>
+          <a:xfrm>
+            <a:off x="1664208" y="4055364"/>
+            <a:ext cx="4229100" cy="1031169"/>
+          </a:xfrm>
+          <a:prstGeom prst="rect">
+            <a:avLst/>
+          </a:prstGeom>
+          <a:noFill/>
+          <a:ln/>
+        </p:spPr>
+        <p:txBody>
+          <a:bodyPr wrap="square" rtlCol="0" anchor="ctr"/>
+          <a:lstStyle/>
+          <a:p>
+            <a:pPr indent="0" marL="0">
+              <a:buNone/>
+            </a:pPr>
+            <a:r>
+              <a:rPr lang="en-US" sz="1400" b="1" dirty="0">
+                <a:solidFill>
+                  <a:srgbClr val="1A1A1A"/>
+                </a:solidFill>
+                <a:latin typeface="微軟正黑體" pitchFamily="34" charset="0"/>
+                <a:ea typeface="微軟正黑體" pitchFamily="34" charset="-122"/>
+                <a:cs typeface="微軟正黑體" pitchFamily="34" charset="-120"/>
+              </a:rPr>
+              <a:t>動手實作</a:t>
+            </a:r>
+            <a:endParaRPr lang="en-US" sz="1400" dirty="0"/>
+          </a:p>
+        </p:txBody>
+      </p:sp>
+      <p:sp>
+        <p:nvSpPr>
+          <p:cNvPr id="28" name="Text 25"/>
+          <p:cNvSpPr/>
+          <p:nvPr/>
+        </p:nvSpPr>
+        <p:spPr>
+          <a:xfrm>
+            <a:off x="1664208" y="5124115"/>
+            <a:ext cx="4229100" cy="1104824"/>
+          </a:xfrm>
+          <a:prstGeom prst="rect">
+            <a:avLst/>
+          </a:prstGeom>
+          <a:noFill/>
+          <a:ln/>
+        </p:spPr>
+        <p:txBody>
+          <a:bodyPr wrap="square" rtlCol="0" anchor="t"/>
+          <a:lstStyle/>
+          <a:p>
+            <a:pPr indent="0" marL="0">
+              <a:buNone/>
+            </a:pPr>
+            <a:r>
+              <a:rPr lang="en-US" sz="1100" dirty="0">
+                <a:solidFill>
+                  <a:srgbClr val="444444"/>
+                </a:solidFill>
+                <a:latin typeface="微軟正黑體" pitchFamily="34" charset="0"/>
+                <a:ea typeface="微軟正黑體" pitchFamily="34" charset="-122"/>
+                <a:cs typeface="微軟正黑體" pitchFamily="34" charset="-120"/>
+              </a:rPr>
+              <a:t>45 min — 4 階段部署你自己的 AI Bot</a:t>
+            </a:r>
+            <a:endParaRPr lang="en-US" sz="1100" dirty="0"/>
+          </a:p>
+        </p:txBody>
+      </p:sp>
+      <p:sp>
+        <p:nvSpPr>
+          <p:cNvPr id="29" name="Shape 26"/>
+          <p:cNvSpPr/>
+          <p:nvPr/>
+        </p:nvSpPr>
+        <p:spPr>
+          <a:xfrm>
+            <a:off x="6176772" y="3945636"/>
+            <a:ext cx="5554980" cy="2455164"/>
+          </a:xfrm>
+          <a:prstGeom prst="rect">
+            <a:avLst/>
+          </a:prstGeom>
+          <a:solidFill>
+            <a:srgbClr val="FAFBFC"/>
+          </a:solidFill>
+          <a:ln w="12700">
+            <a:solidFill>
+              <a:srgbClr val="E5E7EB"/>
+            </a:solidFill>
+            <a:prstDash val="solid"/>
+          </a:ln>
+        </p:spPr>
+      </p:sp>
+      <p:sp>
+        <p:nvSpPr>
+          <p:cNvPr id="30" name="Shape 27"/>
+          <p:cNvSpPr/>
+          <p:nvPr/>
+        </p:nvSpPr>
+        <p:spPr>
+          <a:xfrm>
+            <a:off x="6176772" y="3945636"/>
+            <a:ext cx="64008" cy="2455164"/>
+          </a:xfrm>
+          <a:prstGeom prst="rect">
+            <a:avLst/>
+          </a:prstGeom>
+          <a:solidFill>
+            <a:srgbClr val="F38020"/>
+          </a:solidFill>
+          <a:ln/>
+        </p:spPr>
+      </p:sp>
+      <p:sp>
+        <p:nvSpPr>
+          <p:cNvPr id="31" name="Shape 28"/>
+          <p:cNvSpPr/>
+          <p:nvPr/>
+        </p:nvSpPr>
+        <p:spPr>
+          <a:xfrm>
+            <a:off x="6341364" y="4981194"/>
+            <a:ext cx="384048" cy="384048"/>
+          </a:xfrm>
+          <a:prstGeom prst="ellipse">
+            <a:avLst/>
+          </a:prstGeom>
+          <a:solidFill>
+            <a:srgbClr val="F38020"/>
+          </a:solidFill>
+          <a:ln/>
+        </p:spPr>
+      </p:sp>
+      <p:sp>
+        <p:nvSpPr>
+          <p:cNvPr id="32" name="Text 29"/>
+          <p:cNvSpPr/>
+          <p:nvPr/>
+        </p:nvSpPr>
+        <p:spPr>
+          <a:xfrm>
+            <a:off x="6341364" y="4981194"/>
+            <a:ext cx="384048" cy="384048"/>
+          </a:xfrm>
+          <a:prstGeom prst="rect">
+            <a:avLst/>
+          </a:prstGeom>
+          <a:noFill/>
+          <a:ln/>
+        </p:spPr>
+        <p:txBody>
+          <a:bodyPr wrap="square" rtlCol="0" anchor="ctr"/>
+          <a:lstStyle/>
+          <a:p>
+            <a:pPr algn="ctr" indent="0" marL="0">
+              <a:buNone/>
+            </a:pPr>
+            <a:r>
+              <a:rPr lang="en-US" sz="1400" b="1" dirty="0">
+                <a:solidFill>
+                  <a:srgbClr val="FFFFFF"/>
+                </a:solidFill>
+                <a:latin typeface="微軟正黑體" pitchFamily="34" charset="0"/>
+                <a:ea typeface="微軟正黑體" pitchFamily="34" charset="-122"/>
+                <a:cs typeface="微軟正黑體" pitchFamily="34" charset="-120"/>
+              </a:rPr>
+              <a:t>04</a:t>
+            </a:r>
+            <a:endParaRPr lang="en-US" sz="1400" dirty="0"/>
+          </a:p>
+        </p:txBody>
+      </p:sp>
+      <p:sp>
+        <p:nvSpPr>
+          <p:cNvPr id="33" name="Text 30"/>
+          <p:cNvSpPr/>
+          <p:nvPr/>
+        </p:nvSpPr>
+        <p:spPr>
+          <a:xfrm>
+            <a:off x="6835140" y="4944618"/>
+            <a:ext cx="475488" cy="457200"/>
+          </a:xfrm>
+          <a:prstGeom prst="rect">
+            <a:avLst/>
+          </a:prstGeom>
+          <a:noFill/>
+          <a:ln/>
+        </p:spPr>
+        <p:txBody>
+          <a:bodyPr wrap="square" rtlCol="0" anchor="ctr"/>
+          <a:lstStyle/>
+          <a:p>
+            <a:pPr indent="0" marL="0">
+              <a:buNone/>
+            </a:pPr>
+            <a:r>
+              <a:rPr lang="en-US" sz="2000" dirty="0">
+                <a:solidFill>
+                  <a:srgbClr val="000000"/>
+                </a:solidFill>
+                <a:latin typeface="微軟正黑體" pitchFamily="34" charset="0"/>
+                <a:ea typeface="微軟正黑體" pitchFamily="34" charset="-122"/>
+                <a:cs typeface="微軟正黑體" pitchFamily="34" charset="-120"/>
+              </a:rPr>
+              <a:t>💬</a:t>
+            </a:r>
+            <a:endParaRPr lang="en-US" sz="2000" dirty="0"/>
+          </a:p>
+        </p:txBody>
+      </p:sp>
+      <p:sp>
+        <p:nvSpPr>
+          <p:cNvPr id="34" name="Text 31"/>
+          <p:cNvSpPr/>
+          <p:nvPr/>
+        </p:nvSpPr>
+        <p:spPr>
+          <a:xfrm>
+            <a:off x="7383780" y="4055364"/>
+            <a:ext cx="4229100" cy="1031169"/>
+          </a:xfrm>
+          <a:prstGeom prst="rect">
+            <a:avLst/>
+          </a:prstGeom>
+          <a:noFill/>
+          <a:ln/>
+        </p:spPr>
+        <p:txBody>
+          <a:bodyPr wrap="square" rtlCol="0" anchor="ctr"/>
+          <a:lstStyle/>
+          <a:p>
+            <a:pPr indent="0" marL="0">
+              <a:buNone/>
+            </a:pPr>
+            <a:r>
+              <a:rPr lang="en-US" sz="1400" b="1" dirty="0">
+                <a:solidFill>
+                  <a:srgbClr val="1A1A1A"/>
+                </a:solidFill>
+                <a:latin typeface="微軟正黑體" pitchFamily="34" charset="0"/>
+                <a:ea typeface="微軟正黑體" pitchFamily="34" charset="-122"/>
+                <a:cs typeface="微軟正黑體" pitchFamily="34" charset="-120"/>
+              </a:rPr>
+              <a:t>Q&amp;A + 延伸方向</a:t>
+            </a:r>
+            <a:endParaRPr lang="en-US" sz="1400" dirty="0"/>
+          </a:p>
+        </p:txBody>
+      </p:sp>
+      <p:sp>
+        <p:nvSpPr>
+          <p:cNvPr id="35" name="Text 32"/>
+          <p:cNvSpPr/>
+          <p:nvPr/>
+        </p:nvSpPr>
+        <p:spPr>
+          <a:xfrm>
+            <a:off x="7383780" y="5124115"/>
+            <a:ext cx="4229100" cy="1104824"/>
+          </a:xfrm>
+          <a:prstGeom prst="rect">
+            <a:avLst/>
+          </a:prstGeom>
+          <a:noFill/>
+          <a:ln/>
+        </p:spPr>
+        <p:txBody>
+          <a:bodyPr wrap="square" rtlCol="0" anchor="t"/>
+          <a:lstStyle/>
+          <a:p>
+            <a:pPr indent="0" marL="0">
+              <a:buNone/>
+            </a:pPr>
+            <a:r>
+              <a:rPr lang="en-US" sz="1100" dirty="0">
+                <a:solidFill>
+                  <a:srgbClr val="444444"/>
+                </a:solidFill>
+                <a:latin typeface="微軟正黑體" pitchFamily="34" charset="0"/>
+                <a:ea typeface="微軟正黑體" pitchFamily="34" charset="-122"/>
+                <a:cs typeface="微軟正黑體" pitchFamily="34" charset="-120"/>
+              </a:rPr>
+              <a:t>15 min — 延伸自學地圖 + 樂雲商用方案</a:t>
+            </a:r>
+            <a:endParaRPr lang="en-US" sz="1100" dirty="0"/>
           </a:p>
         </p:txBody>
       </p:sp>

--- a/slides/aigw-course.pptx
+++ b/slides/aigw-course.pptx
@@ -4303,7 +4303,7 @@
             <a:avLst/>
           </a:prstGeom>
           <a:solidFill>
-            <a:srgbClr val="10B981"/>
+            <a:srgbClr val="F38020"/>
           </a:solidFill>
           <a:ln/>
         </p:spPr>
@@ -4341,7 +4341,7 @@
                 <a:ea typeface="Calibri" pitchFamily="34" charset="-122"/>
                 <a:cs typeface="Calibri" pitchFamily="34" charset="-120"/>
               </a:rPr>
-              <a:t>Phase 1</a:t>
+              <a:t>階段 A</a:t>
             </a:r>
             <a:endParaRPr lang="en-US" sz="1400" dirty="0"/>
           </a:p>
@@ -4427,7 +4427,163 @@
       </p:sp>
       <p:sp>
         <p:nvSpPr>
-          <p:cNvPr id="14" name="Shape 11"/>
+          <p:cNvPr id="14" name="Text 11"/>
+          <p:cNvSpPr/>
+          <p:nvPr/>
+        </p:nvSpPr>
+        <p:spPr>
+          <a:xfrm>
+            <a:off x="594360" y="2990088"/>
+            <a:ext cx="2393442" cy="548640"/>
+          </a:xfrm>
+          <a:prstGeom prst="rect">
+            <a:avLst/>
+          </a:prstGeom>
+          <a:noFill/>
+          <a:ln/>
+        </p:spPr>
+        <p:txBody>
+          <a:bodyPr wrap="square" rtlCol="0" anchor="ctr"/>
+          <a:lstStyle/>
+          <a:p>
+            <a:pPr indent="0" marL="0">
+              <a:buNone/>
+            </a:pPr>
+            <a:r>
+              <a:rPr lang="en-US" sz="1100" dirty="0">
+                <a:solidFill>
+                  <a:srgbClr val="444444"/>
+                </a:solidFill>
+                <a:latin typeface="微軟正黑體" pitchFamily="34" charset="0"/>
+                <a:ea typeface="微軟正黑體" pitchFamily="34" charset="-122"/>
+                <a:cs typeface="微軟正黑體" pitchFamily="34" charset="-120"/>
+              </a:rPr>
+              <a:t>▸  git clone &lt;repo&gt;</a:t>
+            </a:r>
+            <a:endParaRPr lang="en-US" sz="1100" dirty="0"/>
+          </a:p>
+        </p:txBody>
+      </p:sp>
+      <p:sp>
+        <p:nvSpPr>
+          <p:cNvPr id="15" name="Text 12"/>
+          <p:cNvSpPr/>
+          <p:nvPr/>
+        </p:nvSpPr>
+        <p:spPr>
+          <a:xfrm>
+            <a:off x="594360" y="3584448"/>
+            <a:ext cx="2393442" cy="548640"/>
+          </a:xfrm>
+          <a:prstGeom prst="rect">
+            <a:avLst/>
+          </a:prstGeom>
+          <a:noFill/>
+          <a:ln/>
+        </p:spPr>
+        <p:txBody>
+          <a:bodyPr wrap="square" rtlCol="0" anchor="ctr"/>
+          <a:lstStyle/>
+          <a:p>
+            <a:pPr indent="0" marL="0">
+              <a:buNone/>
+            </a:pPr>
+            <a:r>
+              <a:rPr lang="en-US" sz="1100" dirty="0">
+                <a:solidFill>
+                  <a:srgbClr val="444444"/>
+                </a:solidFill>
+                <a:latin typeface="微軟正黑體" pitchFamily="34" charset="0"/>
+                <a:ea typeface="微軟正黑體" pitchFamily="34" charset="-122"/>
+                <a:cs typeface="微軟正黑體" pitchFamily="34" charset="-120"/>
+              </a:rPr>
+              <a:t>▸  npm install (worker + frontend)</a:t>
+            </a:r>
+            <a:endParaRPr lang="en-US" sz="1100" dirty="0"/>
+          </a:p>
+        </p:txBody>
+      </p:sp>
+      <p:sp>
+        <p:nvSpPr>
+          <p:cNvPr id="16" name="Text 13"/>
+          <p:cNvSpPr/>
+          <p:nvPr/>
+        </p:nvSpPr>
+        <p:spPr>
+          <a:xfrm>
+            <a:off x="594360" y="4178808"/>
+            <a:ext cx="2393442" cy="548640"/>
+          </a:xfrm>
+          <a:prstGeom prst="rect">
+            <a:avLst/>
+          </a:prstGeom>
+          <a:noFill/>
+          <a:ln/>
+        </p:spPr>
+        <p:txBody>
+          <a:bodyPr wrap="square" rtlCol="0" anchor="ctr"/>
+          <a:lstStyle/>
+          <a:p>
+            <a:pPr indent="0" marL="0">
+              <a:buNone/>
+            </a:pPr>
+            <a:r>
+              <a:rPr lang="en-US" sz="1100" dirty="0">
+                <a:solidFill>
+                  <a:srgbClr val="444444"/>
+                </a:solidFill>
+                <a:latin typeface="微軟正黑體" pitchFamily="34" charset="0"/>
+                <a:ea typeface="微軟正黑體" pitchFamily="34" charset="-122"/>
+                <a:cs typeface="微軟正黑體" pitchFamily="34" charset="-120"/>
+              </a:rPr>
+              <a:t>▸  wrangler login（已預先做完）</a:t>
+            </a:r>
+            <a:endParaRPr lang="en-US" sz="1100" dirty="0"/>
+          </a:p>
+        </p:txBody>
+      </p:sp>
+      <p:sp>
+        <p:nvSpPr>
+          <p:cNvPr id="17" name="Text 14"/>
+          <p:cNvSpPr/>
+          <p:nvPr/>
+        </p:nvSpPr>
+        <p:spPr>
+          <a:xfrm>
+            <a:off x="594360" y="4773168"/>
+            <a:ext cx="2393442" cy="548640"/>
+          </a:xfrm>
+          <a:prstGeom prst="rect">
+            <a:avLst/>
+          </a:prstGeom>
+          <a:noFill/>
+          <a:ln/>
+        </p:spPr>
+        <p:txBody>
+          <a:bodyPr wrap="square" rtlCol="0" anchor="ctr"/>
+          <a:lstStyle/>
+          <a:p>
+            <a:pPr indent="0" marL="0">
+              <a:buNone/>
+            </a:pPr>
+            <a:r>
+              <a:rPr lang="en-US" sz="1100" dirty="0">
+                <a:solidFill>
+                  <a:srgbClr val="444444"/>
+                </a:solidFill>
+                <a:latin typeface="微軟正黑體" pitchFamily="34" charset="0"/>
+                <a:ea typeface="微軟正黑體" pitchFamily="34" charset="-122"/>
+                <a:cs typeface="微軟正黑體" pitchFamily="34" charset="-120"/>
+              </a:rPr>
+              <a:t>▸  wrangler d1 create + kv namespace create</a:t>
+            </a:r>
+            <a:endParaRPr lang="en-US" sz="1100" dirty="0"/>
+          </a:p>
+        </p:txBody>
+      </p:sp>
+      <p:sp>
+        <p:nvSpPr>
+          <p:cNvPr id="18" name="Shape 15"/>
           <p:cNvSpPr/>
           <p:nvPr/>
         </p:nvSpPr>
@@ -4440,14 +4596,14 @@
             <a:avLst/>
           </a:prstGeom>
           <a:solidFill>
-            <a:srgbClr val="10B981"/>
+            <a:srgbClr val="F38020"/>
           </a:solidFill>
           <a:ln/>
         </p:spPr>
       </p:sp>
       <p:sp>
         <p:nvSpPr>
-          <p:cNvPr id="15" name="Text 12"/>
+          <p:cNvPr id="19" name="Text 16"/>
           <p:cNvSpPr/>
           <p:nvPr/>
         </p:nvSpPr>
@@ -4486,7 +4642,7 @@
       </p:sp>
       <p:sp>
         <p:nvSpPr>
-          <p:cNvPr id="16" name="Shape 13"/>
+          <p:cNvPr id="20" name="Shape 17"/>
           <p:cNvSpPr/>
           <p:nvPr/>
         </p:nvSpPr>
@@ -4506,7 +4662,7 @@
       </p:sp>
       <p:sp>
         <p:nvSpPr>
-          <p:cNvPr id="17" name="Shape 14"/>
+          <p:cNvPr id="21" name="Shape 18"/>
           <p:cNvSpPr/>
           <p:nvPr/>
         </p:nvSpPr>
@@ -4531,7 +4687,7 @@
       </p:sp>
       <p:sp>
         <p:nvSpPr>
-          <p:cNvPr id="18" name="Shape 15"/>
+          <p:cNvPr id="22" name="Shape 19"/>
           <p:cNvSpPr/>
           <p:nvPr/>
         </p:nvSpPr>
@@ -4541,6 +4697,358 @@
             <a:ext cx="2667762" cy="530352"/>
           </a:xfrm>
           <a:prstGeom prst="rect">
+            <a:avLst/>
+          </a:prstGeom>
+          <a:solidFill>
+            <a:srgbClr val="10B981"/>
+          </a:solidFill>
+          <a:ln/>
+        </p:spPr>
+      </p:sp>
+      <p:sp>
+        <p:nvSpPr>
+          <p:cNvPr id="23" name="Text 20"/>
+          <p:cNvSpPr/>
+          <p:nvPr/>
+        </p:nvSpPr>
+        <p:spPr>
+          <a:xfrm>
+            <a:off x="3326130" y="1572768"/>
+            <a:ext cx="1200493" cy="530352"/>
+          </a:xfrm>
+          <a:prstGeom prst="rect">
+            <a:avLst/>
+          </a:prstGeom>
+          <a:noFill/>
+          <a:ln/>
+        </p:spPr>
+        <p:txBody>
+          <a:bodyPr wrap="square" rtlCol="0" anchor="ctr"/>
+          <a:lstStyle/>
+          <a:p>
+            <a:pPr algn="ctr" indent="0" marL="0">
+              <a:buNone/>
+            </a:pPr>
+            <a:r>
+              <a:rPr lang="en-US" sz="1400" b="1" dirty="0">
+                <a:solidFill>
+                  <a:srgbClr val="FFFFFF"/>
+                </a:solidFill>
+                <a:latin typeface="Calibri" pitchFamily="34" charset="0"/>
+                <a:ea typeface="Calibri" pitchFamily="34" charset="-122"/>
+                <a:cs typeface="Calibri" pitchFamily="34" charset="-120"/>
+              </a:rPr>
+              <a:t>階段 B</a:t>
+            </a:r>
+            <a:endParaRPr lang="en-US" sz="1400" dirty="0"/>
+          </a:p>
+        </p:txBody>
+      </p:sp>
+      <p:sp>
+        <p:nvSpPr>
+          <p:cNvPr id="24" name="Text 21"/>
+          <p:cNvSpPr/>
+          <p:nvPr/>
+        </p:nvSpPr>
+        <p:spPr>
+          <a:xfrm>
+            <a:off x="4526623" y="1572768"/>
+            <a:ext cx="1467269" cy="530352"/>
+          </a:xfrm>
+          <a:prstGeom prst="rect">
+            <a:avLst/>
+          </a:prstGeom>
+          <a:noFill/>
+          <a:ln/>
+        </p:spPr>
+        <p:txBody>
+          <a:bodyPr wrap="square" rtlCol="0" anchor="ctr"/>
+          <a:lstStyle/>
+          <a:p>
+            <a:pPr indent="0" marL="0">
+              <a:buNone/>
+            </a:pPr>
+            <a:r>
+              <a:rPr lang="en-US" sz="1000" dirty="0">
+                <a:solidFill>
+                  <a:srgbClr val="FFFFFF"/>
+                </a:solidFill>
+                <a:latin typeface="微軟正黑體" pitchFamily="34" charset="0"/>
+                <a:ea typeface="微軟正黑體" pitchFamily="34" charset="-122"/>
+                <a:cs typeface="微軟正黑體" pitchFamily="34" charset="-120"/>
+              </a:rPr>
+              <a:t>15 min</a:t>
+            </a:r>
+            <a:endParaRPr lang="en-US" sz="1000" dirty="0"/>
+          </a:p>
+        </p:txBody>
+      </p:sp>
+      <p:sp>
+        <p:nvSpPr>
+          <p:cNvPr id="25" name="Text 22"/>
+          <p:cNvSpPr/>
+          <p:nvPr/>
+        </p:nvSpPr>
+        <p:spPr>
+          <a:xfrm>
+            <a:off x="3463290" y="2194560"/>
+            <a:ext cx="2393442" cy="384048"/>
+          </a:xfrm>
+          <a:prstGeom prst="rect">
+            <a:avLst/>
+          </a:prstGeom>
+          <a:noFill/>
+          <a:ln/>
+        </p:spPr>
+        <p:txBody>
+          <a:bodyPr wrap="square" rtlCol="0" anchor="ctr"/>
+          <a:lstStyle/>
+          <a:p>
+            <a:pPr indent="0" marL="0">
+              <a:buNone/>
+            </a:pPr>
+            <a:r>
+              <a:rPr lang="en-US" sz="1500" b="1" dirty="0">
+                <a:solidFill>
+                  <a:srgbClr val="1A1A1A"/>
+                </a:solidFill>
+                <a:latin typeface="微軟正黑體" pitchFamily="34" charset="0"/>
+                <a:ea typeface="微軟正黑體" pitchFamily="34" charset="-122"/>
+                <a:cs typeface="微軟正黑體" pitchFamily="34" charset="-120"/>
+              </a:rPr>
+              <a:t>設定金鑰</a:t>
+            </a:r>
+            <a:endParaRPr lang="en-US" sz="1500" dirty="0"/>
+          </a:p>
+        </p:txBody>
+      </p:sp>
+      <p:sp>
+        <p:nvSpPr>
+          <p:cNvPr id="26" name="Text 23"/>
+          <p:cNvSpPr/>
+          <p:nvPr/>
+        </p:nvSpPr>
+        <p:spPr>
+          <a:xfrm>
+            <a:off x="3463290" y="2990088"/>
+            <a:ext cx="2393442" cy="548640"/>
+          </a:xfrm>
+          <a:prstGeom prst="rect">
+            <a:avLst/>
+          </a:prstGeom>
+          <a:noFill/>
+          <a:ln/>
+        </p:spPr>
+        <p:txBody>
+          <a:bodyPr wrap="square" rtlCol="0" anchor="ctr"/>
+          <a:lstStyle/>
+          <a:p>
+            <a:pPr indent="0" marL="0">
+              <a:buNone/>
+            </a:pPr>
+            <a:r>
+              <a:rPr lang="en-US" sz="1100" dirty="0">
+                <a:solidFill>
+                  <a:srgbClr val="444444"/>
+                </a:solidFill>
+                <a:latin typeface="微軟正黑體" pitchFamily="34" charset="0"/>
+                <a:ea typeface="微軟正黑體" pitchFamily="34" charset="-122"/>
+                <a:cs typeface="微軟正黑體" pitchFamily="34" charset="-120"/>
+              </a:rPr>
+              <a:t>▸  Dashboard 建 AI Gateway → Gateway Token</a:t>
+            </a:r>
+            <a:endParaRPr lang="en-US" sz="1100" dirty="0"/>
+          </a:p>
+        </p:txBody>
+      </p:sp>
+      <p:sp>
+        <p:nvSpPr>
+          <p:cNvPr id="27" name="Text 24"/>
+          <p:cNvSpPr/>
+          <p:nvPr/>
+        </p:nvSpPr>
+        <p:spPr>
+          <a:xfrm>
+            <a:off x="3463290" y="3584448"/>
+            <a:ext cx="2393442" cy="548640"/>
+          </a:xfrm>
+          <a:prstGeom prst="rect">
+            <a:avLst/>
+          </a:prstGeom>
+          <a:noFill/>
+          <a:ln/>
+        </p:spPr>
+        <p:txBody>
+          <a:bodyPr wrap="square" rtlCol="0" anchor="ctr"/>
+          <a:lstStyle/>
+          <a:p>
+            <a:pPr indent="0" marL="0">
+              <a:buNone/>
+            </a:pPr>
+            <a:r>
+              <a:rPr lang="en-US" sz="1100" dirty="0">
+                <a:solidFill>
+                  <a:srgbClr val="444444"/>
+                </a:solidFill>
+                <a:latin typeface="微軟正黑體" pitchFamily="34" charset="0"/>
+                <a:ea typeface="微軟正黑體" pitchFamily="34" charset="-122"/>
+                <a:cs typeface="微軟正黑體" pitchFamily="34" charset="-120"/>
+              </a:rPr>
+              <a:t>▸  設定 BYOK alias (claude_demo)</a:t>
+            </a:r>
+            <a:endParaRPr lang="en-US" sz="1100" dirty="0"/>
+          </a:p>
+        </p:txBody>
+      </p:sp>
+      <p:sp>
+        <p:nvSpPr>
+          <p:cNvPr id="28" name="Text 25"/>
+          <p:cNvSpPr/>
+          <p:nvPr/>
+        </p:nvSpPr>
+        <p:spPr>
+          <a:xfrm>
+            <a:off x="3463290" y="4178808"/>
+            <a:ext cx="2393442" cy="548640"/>
+          </a:xfrm>
+          <a:prstGeom prst="rect">
+            <a:avLst/>
+          </a:prstGeom>
+          <a:noFill/>
+          <a:ln/>
+        </p:spPr>
+        <p:txBody>
+          <a:bodyPr wrap="square" rtlCol="0" anchor="ctr"/>
+          <a:lstStyle/>
+          <a:p>
+            <a:pPr indent="0" marL="0">
+              <a:buNone/>
+            </a:pPr>
+            <a:r>
+              <a:rPr lang="en-US" sz="1100" dirty="0">
+                <a:solidFill>
+                  <a:srgbClr val="444444"/>
+                </a:solidFill>
+                <a:latin typeface="微軟正黑體" pitchFamily="34" charset="0"/>
+                <a:ea typeface="微軟正黑體" pitchFamily="34" charset="-122"/>
+                <a:cs typeface="微軟正黑體" pitchFamily="34" charset="-120"/>
+              </a:rPr>
+              <a:t>▸  cp wrangler.toml.example → 填 5 個 ID</a:t>
+            </a:r>
+            <a:endParaRPr lang="en-US" sz="1100" dirty="0"/>
+          </a:p>
+        </p:txBody>
+      </p:sp>
+      <p:sp>
+        <p:nvSpPr>
+          <p:cNvPr id="29" name="Text 26"/>
+          <p:cNvSpPr/>
+          <p:nvPr/>
+        </p:nvSpPr>
+        <p:spPr>
+          <a:xfrm>
+            <a:off x="3463290" y="4773168"/>
+            <a:ext cx="2393442" cy="548640"/>
+          </a:xfrm>
+          <a:prstGeom prst="rect">
+            <a:avLst/>
+          </a:prstGeom>
+          <a:noFill/>
+          <a:ln/>
+        </p:spPr>
+        <p:txBody>
+          <a:bodyPr wrap="square" rtlCol="0" anchor="ctr"/>
+          <a:lstStyle/>
+          <a:p>
+            <a:pPr indent="0" marL="0">
+              <a:buNone/>
+            </a:pPr>
+            <a:r>
+              <a:rPr lang="en-US" sz="1100" dirty="0">
+                <a:solidFill>
+                  <a:srgbClr val="444444"/>
+                </a:solidFill>
+                <a:latin typeface="微軟正黑體" pitchFamily="34" charset="0"/>
+                <a:ea typeface="微軟正黑體" pitchFamily="34" charset="-122"/>
+                <a:cs typeface="微軟正黑體" pitchFamily="34" charset="-120"/>
+              </a:rPr>
+              <a:t>▸  wrangler secret put × 2</a:t>
+            </a:r>
+            <a:endParaRPr lang="en-US" sz="1100" dirty="0"/>
+          </a:p>
+        </p:txBody>
+      </p:sp>
+      <p:sp>
+        <p:nvSpPr>
+          <p:cNvPr id="30" name="Shape 27"/>
+          <p:cNvSpPr/>
+          <p:nvPr/>
+        </p:nvSpPr>
+        <p:spPr>
+          <a:xfrm>
+            <a:off x="3463290" y="6080760"/>
+            <a:ext cx="2393442" cy="384048"/>
+          </a:xfrm>
+          <a:prstGeom prst="rect">
+            <a:avLst/>
+          </a:prstGeom>
+          <a:solidFill>
+            <a:srgbClr val="10B981"/>
+          </a:solidFill>
+          <a:ln/>
+        </p:spPr>
+      </p:sp>
+      <p:sp>
+        <p:nvSpPr>
+          <p:cNvPr id="31" name="Text 28"/>
+          <p:cNvSpPr/>
+          <p:nvPr/>
+        </p:nvSpPr>
+        <p:spPr>
+          <a:xfrm>
+            <a:off x="3463290" y="6080760"/>
+            <a:ext cx="2393442" cy="384048"/>
+          </a:xfrm>
+          <a:prstGeom prst="rect">
+            <a:avLst/>
+          </a:prstGeom>
+          <a:noFill/>
+          <a:ln/>
+        </p:spPr>
+        <p:txBody>
+          <a:bodyPr wrap="square" rtlCol="0" anchor="ctr"/>
+          <a:lstStyle/>
+          <a:p>
+            <a:pPr algn="ctr" indent="0" marL="0">
+              <a:buNone/>
+            </a:pPr>
+            <a:r>
+              <a:rPr lang="en-US" sz="1200" b="1" dirty="0">
+                <a:solidFill>
+                  <a:srgbClr val="FFFFFF"/>
+                </a:solidFill>
+                <a:latin typeface="微軟正黑體" pitchFamily="34" charset="0"/>
+                <a:ea typeface="微軟正黑體" pitchFamily="34" charset="-122"/>
+                <a:cs typeface="微軟正黑體" pitchFamily="34" charset="-120"/>
+              </a:rPr>
+              <a:t>wrangler.toml 完整可用</a:t>
+            </a:r>
+            <a:endParaRPr lang="en-US" sz="1200" dirty="0"/>
+          </a:p>
+        </p:txBody>
+      </p:sp>
+      <p:sp>
+        <p:nvSpPr>
+          <p:cNvPr id="32" name="Shape 29"/>
+          <p:cNvSpPr/>
+          <p:nvPr/>
+        </p:nvSpPr>
+        <p:spPr>
+          <a:xfrm rot="5400000">
+            <a:off x="5993892" y="3918204"/>
+            <a:ext cx="201168" cy="292608"/>
+          </a:xfrm>
+          <a:prstGeom prst="triangle">
             <a:avLst/>
           </a:prstGeom>
           <a:solidFill>
@@ -4551,203 +5059,7 @@
       </p:sp>
       <p:sp>
         <p:nvSpPr>
-          <p:cNvPr id="19" name="Text 16"/>
-          <p:cNvSpPr/>
-          <p:nvPr/>
-        </p:nvSpPr>
-        <p:spPr>
-          <a:xfrm>
-            <a:off x="3326130" y="1572768"/>
-            <a:ext cx="1200493" cy="530352"/>
-          </a:xfrm>
-          <a:prstGeom prst="rect">
-            <a:avLst/>
-          </a:prstGeom>
-          <a:noFill/>
-          <a:ln/>
-        </p:spPr>
-        <p:txBody>
-          <a:bodyPr wrap="square" rtlCol="0" anchor="ctr"/>
-          <a:lstStyle/>
-          <a:p>
-            <a:pPr algn="ctr" indent="0" marL="0">
-              <a:buNone/>
-            </a:pPr>
-            <a:r>
-              <a:rPr lang="en-US" sz="1400" b="1" dirty="0">
-                <a:solidFill>
-                  <a:srgbClr val="FFFFFF"/>
-                </a:solidFill>
-                <a:latin typeface="Calibri" pitchFamily="34" charset="0"/>
-                <a:ea typeface="Calibri" pitchFamily="34" charset="-122"/>
-                <a:cs typeface="Calibri" pitchFamily="34" charset="-120"/>
-              </a:rPr>
-              <a:t>Phase 2</a:t>
-            </a:r>
-            <a:endParaRPr lang="en-US" sz="1400" dirty="0"/>
-          </a:p>
-        </p:txBody>
-      </p:sp>
-      <p:sp>
-        <p:nvSpPr>
-          <p:cNvPr id="20" name="Text 17"/>
-          <p:cNvSpPr/>
-          <p:nvPr/>
-        </p:nvSpPr>
-        <p:spPr>
-          <a:xfrm>
-            <a:off x="4526623" y="1572768"/>
-            <a:ext cx="1467269" cy="530352"/>
-          </a:xfrm>
-          <a:prstGeom prst="rect">
-            <a:avLst/>
-          </a:prstGeom>
-          <a:noFill/>
-          <a:ln/>
-        </p:spPr>
-        <p:txBody>
-          <a:bodyPr wrap="square" rtlCol="0" anchor="ctr"/>
-          <a:lstStyle/>
-          <a:p>
-            <a:pPr indent="0" marL="0">
-              <a:buNone/>
-            </a:pPr>
-            <a:r>
-              <a:rPr lang="en-US" sz="1000" dirty="0">
-                <a:solidFill>
-                  <a:srgbClr val="FFFFFF"/>
-                </a:solidFill>
-                <a:latin typeface="微軟正黑體" pitchFamily="34" charset="0"/>
-                <a:ea typeface="微軟正黑體" pitchFamily="34" charset="-122"/>
-                <a:cs typeface="微軟正黑體" pitchFamily="34" charset="-120"/>
-              </a:rPr>
-              <a:t>15 min</a:t>
-            </a:r>
-            <a:endParaRPr lang="en-US" sz="1000" dirty="0"/>
-          </a:p>
-        </p:txBody>
-      </p:sp>
-      <p:sp>
-        <p:nvSpPr>
-          <p:cNvPr id="21" name="Text 18"/>
-          <p:cNvSpPr/>
-          <p:nvPr/>
-        </p:nvSpPr>
-        <p:spPr>
-          <a:xfrm>
-            <a:off x="3463290" y="2194560"/>
-            <a:ext cx="2393442" cy="384048"/>
-          </a:xfrm>
-          <a:prstGeom prst="rect">
-            <a:avLst/>
-          </a:prstGeom>
-          <a:noFill/>
-          <a:ln/>
-        </p:spPr>
-        <p:txBody>
-          <a:bodyPr wrap="square" rtlCol="0" anchor="ctr"/>
-          <a:lstStyle/>
-          <a:p>
-            <a:pPr indent="0" marL="0">
-              <a:buNone/>
-            </a:pPr>
-            <a:r>
-              <a:rPr lang="en-US" sz="1500" b="1" dirty="0">
-                <a:solidFill>
-                  <a:srgbClr val="1A1A1A"/>
-                </a:solidFill>
-                <a:latin typeface="微軟正黑體" pitchFamily="34" charset="0"/>
-                <a:ea typeface="微軟正黑體" pitchFamily="34" charset="-122"/>
-                <a:cs typeface="微軟正黑體" pitchFamily="34" charset="-120"/>
-              </a:rPr>
-              <a:t>設定金鑰</a:t>
-            </a:r>
-            <a:endParaRPr lang="en-US" sz="1500" dirty="0"/>
-          </a:p>
-        </p:txBody>
-      </p:sp>
-      <p:sp>
-        <p:nvSpPr>
-          <p:cNvPr id="22" name="Shape 19"/>
-          <p:cNvSpPr/>
-          <p:nvPr/>
-        </p:nvSpPr>
-        <p:spPr>
-          <a:xfrm>
-            <a:off x="3463290" y="6080760"/>
-            <a:ext cx="2393442" cy="384048"/>
-          </a:xfrm>
-          <a:prstGeom prst="rect">
-            <a:avLst/>
-          </a:prstGeom>
-          <a:solidFill>
-            <a:srgbClr val="F38020"/>
-          </a:solidFill>
-          <a:ln/>
-        </p:spPr>
-      </p:sp>
-      <p:sp>
-        <p:nvSpPr>
-          <p:cNvPr id="23" name="Text 20"/>
-          <p:cNvSpPr/>
-          <p:nvPr/>
-        </p:nvSpPr>
-        <p:spPr>
-          <a:xfrm>
-            <a:off x="3463290" y="6080760"/>
-            <a:ext cx="2393442" cy="384048"/>
-          </a:xfrm>
-          <a:prstGeom prst="rect">
-            <a:avLst/>
-          </a:prstGeom>
-          <a:noFill/>
-          <a:ln/>
-        </p:spPr>
-        <p:txBody>
-          <a:bodyPr wrap="square" rtlCol="0" anchor="ctr"/>
-          <a:lstStyle/>
-          <a:p>
-            <a:pPr algn="ctr" indent="0" marL="0">
-              <a:buNone/>
-            </a:pPr>
-            <a:r>
-              <a:rPr lang="en-US" sz="1200" b="1" dirty="0">
-                <a:solidFill>
-                  <a:srgbClr val="FFFFFF"/>
-                </a:solidFill>
-                <a:latin typeface="微軟正黑體" pitchFamily="34" charset="0"/>
-                <a:ea typeface="微軟正黑體" pitchFamily="34" charset="-122"/>
-                <a:cs typeface="微軟正黑體" pitchFamily="34" charset="-120"/>
-              </a:rPr>
-              <a:t>wrangler.toml 完整可用</a:t>
-            </a:r>
-            <a:endParaRPr lang="en-US" sz="1200" dirty="0"/>
-          </a:p>
-        </p:txBody>
-      </p:sp>
-      <p:sp>
-        <p:nvSpPr>
-          <p:cNvPr id="24" name="Shape 21"/>
-          <p:cNvSpPr/>
-          <p:nvPr/>
-        </p:nvSpPr>
-        <p:spPr>
-          <a:xfrm rot="5400000">
-            <a:off x="5993892" y="3918204"/>
-            <a:ext cx="201168" cy="292608"/>
-          </a:xfrm>
-          <a:prstGeom prst="triangle">
-            <a:avLst/>
-          </a:prstGeom>
-          <a:solidFill>
-            <a:srgbClr val="F38020"/>
-          </a:solidFill>
-          <a:ln/>
-        </p:spPr>
-      </p:sp>
-      <p:sp>
-        <p:nvSpPr>
-          <p:cNvPr id="25" name="Shape 22"/>
+          <p:cNvPr id="33" name="Shape 30"/>
           <p:cNvSpPr/>
           <p:nvPr/>
         </p:nvSpPr>
@@ -4772,7 +5084,7 @@
       </p:sp>
       <p:sp>
         <p:nvSpPr>
-          <p:cNvPr id="26" name="Shape 23"/>
+          <p:cNvPr id="34" name="Shape 31"/>
           <p:cNvSpPr/>
           <p:nvPr/>
         </p:nvSpPr>
@@ -4785,14 +5097,14 @@
             <a:avLst/>
           </a:prstGeom>
           <a:solidFill>
-            <a:srgbClr val="1E2761"/>
+            <a:srgbClr val="8B5CF6"/>
           </a:solidFill>
           <a:ln/>
         </p:spPr>
       </p:sp>
       <p:sp>
         <p:nvSpPr>
-          <p:cNvPr id="27" name="Text 24"/>
+          <p:cNvPr id="35" name="Text 32"/>
           <p:cNvSpPr/>
           <p:nvPr/>
         </p:nvSpPr>
@@ -4823,7 +5135,7 @@
                 <a:ea typeface="Calibri" pitchFamily="34" charset="-122"/>
                 <a:cs typeface="Calibri" pitchFamily="34" charset="-120"/>
               </a:rPr>
-              <a:t>Phase 3</a:t>
+              <a:t>階段 C</a:t>
             </a:r>
             <a:endParaRPr lang="en-US" sz="1400" dirty="0"/>
           </a:p>
@@ -4831,7 +5143,7 @@
       </p:sp>
       <p:sp>
         <p:nvSpPr>
-          <p:cNvPr id="28" name="Text 25"/>
+          <p:cNvPr id="36" name="Text 33"/>
           <p:cNvSpPr/>
           <p:nvPr/>
         </p:nvSpPr>
@@ -4870,7 +5182,7 @@
       </p:sp>
       <p:sp>
         <p:nvSpPr>
-          <p:cNvPr id="29" name="Text 26"/>
+          <p:cNvPr id="37" name="Text 34"/>
           <p:cNvSpPr/>
           <p:nvPr/>
         </p:nvSpPr>
@@ -4909,7 +5221,163 @@
       </p:sp>
       <p:sp>
         <p:nvSpPr>
-          <p:cNvPr id="30" name="Shape 27"/>
+          <p:cNvPr id="38" name="Text 35"/>
+          <p:cNvSpPr/>
+          <p:nvPr/>
+        </p:nvSpPr>
+        <p:spPr>
+          <a:xfrm>
+            <a:off x="6332220" y="2990088"/>
+            <a:ext cx="2393442" cy="548640"/>
+          </a:xfrm>
+          <a:prstGeom prst="rect">
+            <a:avLst/>
+          </a:prstGeom>
+          <a:noFill/>
+          <a:ln/>
+        </p:spPr>
+        <p:txBody>
+          <a:bodyPr wrap="square" rtlCol="0" anchor="ctr"/>
+          <a:lstStyle/>
+          <a:p>
+            <a:pPr indent="0" marL="0">
+              <a:buNone/>
+            </a:pPr>
+            <a:r>
+              <a:rPr lang="en-US" sz="1100" dirty="0">
+                <a:solidFill>
+                  <a:srgbClr val="444444"/>
+                </a:solidFill>
+                <a:latin typeface="微軟正黑體" pitchFamily="34" charset="0"/>
+                <a:ea typeface="微軟正黑體" pitchFamily="34" charset="-122"/>
+                <a:cs typeface="微軟正黑體" pitchFamily="34" charset="-120"/>
+              </a:rPr>
+              <a:t>▸  npm run db:init</a:t>
+            </a:r>
+            <a:endParaRPr lang="en-US" sz="1100" dirty="0"/>
+          </a:p>
+        </p:txBody>
+      </p:sp>
+      <p:sp>
+        <p:nvSpPr>
+          <p:cNvPr id="39" name="Text 36"/>
+          <p:cNvSpPr/>
+          <p:nvPr/>
+        </p:nvSpPr>
+        <p:spPr>
+          <a:xfrm>
+            <a:off x="6332220" y="3584448"/>
+            <a:ext cx="2393442" cy="548640"/>
+          </a:xfrm>
+          <a:prstGeom prst="rect">
+            <a:avLst/>
+          </a:prstGeom>
+          <a:noFill/>
+          <a:ln/>
+        </p:spPr>
+        <p:txBody>
+          <a:bodyPr wrap="square" rtlCol="0" anchor="ctr"/>
+          <a:lstStyle/>
+          <a:p>
+            <a:pPr indent="0" marL="0">
+              <a:buNone/>
+            </a:pPr>
+            <a:r>
+              <a:rPr lang="en-US" sz="1100" dirty="0">
+                <a:solidFill>
+                  <a:srgbClr val="444444"/>
+                </a:solidFill>
+                <a:latin typeface="微軟正黑體" pitchFamily="34" charset="0"/>
+                <a:ea typeface="微軟正黑體" pitchFamily="34" charset="-122"/>
+                <a:cs typeface="微軟正黑體" pitchFamily="34" charset="-120"/>
+              </a:rPr>
+              <a:t>▸  npm run deploy (Worker)</a:t>
+            </a:r>
+            <a:endParaRPr lang="en-US" sz="1100" dirty="0"/>
+          </a:p>
+        </p:txBody>
+      </p:sp>
+      <p:sp>
+        <p:nvSpPr>
+          <p:cNvPr id="40" name="Text 37"/>
+          <p:cNvSpPr/>
+          <p:nvPr/>
+        </p:nvSpPr>
+        <p:spPr>
+          <a:xfrm>
+            <a:off x="6332220" y="4178808"/>
+            <a:ext cx="2393442" cy="548640"/>
+          </a:xfrm>
+          <a:prstGeom prst="rect">
+            <a:avLst/>
+          </a:prstGeom>
+          <a:noFill/>
+          <a:ln/>
+        </p:spPr>
+        <p:txBody>
+          <a:bodyPr wrap="square" rtlCol="0" anchor="ctr"/>
+          <a:lstStyle/>
+          <a:p>
+            <a:pPr indent="0" marL="0">
+              <a:buNone/>
+            </a:pPr>
+            <a:r>
+              <a:rPr lang="en-US" sz="1100" dirty="0">
+                <a:solidFill>
+                  <a:srgbClr val="444444"/>
+                </a:solidFill>
+                <a:latin typeface="微軟正黑體" pitchFamily="34" charset="0"/>
+                <a:ea typeface="微軟正黑體" pitchFamily="34" charset="-122"/>
+                <a:cs typeface="微軟正黑體" pitchFamily="34" charset="-120"/>
+              </a:rPr>
+              <a:t>▸  前端 npm run build &amp;&amp; deploy</a:t>
+            </a:r>
+            <a:endParaRPr lang="en-US" sz="1100" dirty="0"/>
+          </a:p>
+        </p:txBody>
+      </p:sp>
+      <p:sp>
+        <p:nvSpPr>
+          <p:cNvPr id="41" name="Text 38"/>
+          <p:cNvSpPr/>
+          <p:nvPr/>
+        </p:nvSpPr>
+        <p:spPr>
+          <a:xfrm>
+            <a:off x="6332220" y="4773168"/>
+            <a:ext cx="2393442" cy="548640"/>
+          </a:xfrm>
+          <a:prstGeom prst="rect">
+            <a:avLst/>
+          </a:prstGeom>
+          <a:noFill/>
+          <a:ln/>
+        </p:spPr>
+        <p:txBody>
+          <a:bodyPr wrap="square" rtlCol="0" anchor="ctr"/>
+          <a:lstStyle/>
+          <a:p>
+            <a:pPr indent="0" marL="0">
+              <a:buNone/>
+            </a:pPr>
+            <a:r>
+              <a:rPr lang="en-US" sz="1100" dirty="0">
+                <a:solidFill>
+                  <a:srgbClr val="444444"/>
+                </a:solidFill>
+                <a:latin typeface="微軟正黑體" pitchFamily="34" charset="0"/>
+                <a:ea typeface="微軟正黑體" pitchFamily="34" charset="-122"/>
+                <a:cs typeface="微軟正黑體" pitchFamily="34" charset="-120"/>
+              </a:rPr>
+              <a:t>▸  註冊 → 登入 → 對話成功</a:t>
+            </a:r>
+            <a:endParaRPr lang="en-US" sz="1100" dirty="0"/>
+          </a:p>
+        </p:txBody>
+      </p:sp>
+      <p:sp>
+        <p:nvSpPr>
+          <p:cNvPr id="42" name="Shape 39"/>
           <p:cNvSpPr/>
           <p:nvPr/>
         </p:nvSpPr>
@@ -4922,14 +5390,14 @@
             <a:avLst/>
           </a:prstGeom>
           <a:solidFill>
-            <a:srgbClr val="1E2761"/>
+            <a:srgbClr val="8B5CF6"/>
           </a:solidFill>
           <a:ln/>
         </p:spPr>
       </p:sp>
       <p:sp>
         <p:nvSpPr>
-          <p:cNvPr id="31" name="Text 28"/>
+          <p:cNvPr id="43" name="Text 40"/>
           <p:cNvSpPr/>
           <p:nvPr/>
         </p:nvSpPr>
@@ -4968,7 +5436,7 @@
       </p:sp>
       <p:sp>
         <p:nvSpPr>
-          <p:cNvPr id="32" name="Shape 29"/>
+          <p:cNvPr id="44" name="Shape 41"/>
           <p:cNvSpPr/>
           <p:nvPr/>
         </p:nvSpPr>
@@ -4988,7 +5456,7 @@
       </p:sp>
       <p:sp>
         <p:nvSpPr>
-          <p:cNvPr id="33" name="Shape 30"/>
+          <p:cNvPr id="45" name="Shape 42"/>
           <p:cNvSpPr/>
           <p:nvPr/>
         </p:nvSpPr>
@@ -5013,7 +5481,7 @@
       </p:sp>
       <p:sp>
         <p:nvSpPr>
-          <p:cNvPr id="34" name="Shape 31"/>
+          <p:cNvPr id="46" name="Shape 43"/>
           <p:cNvSpPr/>
           <p:nvPr/>
         </p:nvSpPr>
@@ -5026,14 +5494,14 @@
             <a:avLst/>
           </a:prstGeom>
           <a:solidFill>
-            <a:srgbClr val="F38020"/>
+            <a:srgbClr val="1E2761"/>
           </a:solidFill>
           <a:ln/>
         </p:spPr>
       </p:sp>
       <p:sp>
         <p:nvSpPr>
-          <p:cNvPr id="35" name="Text 32"/>
+          <p:cNvPr id="47" name="Text 44"/>
           <p:cNvSpPr/>
           <p:nvPr/>
         </p:nvSpPr>
@@ -5064,7 +5532,7 @@
                 <a:ea typeface="Calibri" pitchFamily="34" charset="-122"/>
                 <a:cs typeface="Calibri" pitchFamily="34" charset="-120"/>
               </a:rPr>
-              <a:t>Phase 4</a:t>
+              <a:t>階段 D</a:t>
             </a:r>
             <a:endParaRPr lang="en-US" sz="1400" dirty="0"/>
           </a:p>
@@ -5072,7 +5540,7 @@
       </p:sp>
       <p:sp>
         <p:nvSpPr>
-          <p:cNvPr id="36" name="Text 33"/>
+          <p:cNvPr id="48" name="Text 45"/>
           <p:cNvSpPr/>
           <p:nvPr/>
         </p:nvSpPr>
@@ -5111,7 +5579,7 @@
       </p:sp>
       <p:sp>
         <p:nvSpPr>
-          <p:cNvPr id="37" name="Text 34"/>
+          <p:cNvPr id="49" name="Text 46"/>
           <p:cNvSpPr/>
           <p:nvPr/>
         </p:nvSpPr>
@@ -5150,7 +5618,163 @@
       </p:sp>
       <p:sp>
         <p:nvSpPr>
-          <p:cNvPr id="38" name="Shape 35"/>
+          <p:cNvPr id="50" name="Text 47"/>
+          <p:cNvSpPr/>
+          <p:nvPr/>
+        </p:nvSpPr>
+        <p:spPr>
+          <a:xfrm>
+            <a:off x="9201150" y="2990088"/>
+            <a:ext cx="2393442" cy="548640"/>
+          </a:xfrm>
+          <a:prstGeom prst="rect">
+            <a:avLst/>
+          </a:prstGeom>
+          <a:noFill/>
+          <a:ln/>
+        </p:spPr>
+        <p:txBody>
+          <a:bodyPr wrap="square" rtlCol="0" anchor="ctr"/>
+          <a:lstStyle/>
+          <a:p>
+            <a:pPr indent="0" marL="0">
+              <a:buNone/>
+            </a:pPr>
+            <a:r>
+              <a:rPr lang="en-US" sz="1100" dirty="0">
+                <a:solidFill>
+                  <a:srgbClr val="444444"/>
+                </a:solidFill>
+                <a:latin typeface="微軟正黑體" pitchFamily="34" charset="0"/>
+                <a:ea typeface="微軟正黑體" pitchFamily="34" charset="-122"/>
+                <a:cs typeface="微軟正黑體" pitchFamily="34" charset="-120"/>
+              </a:rPr>
+              <a:t>▸  MCP 工具管理頁查看工具</a:t>
+            </a:r>
+            <a:endParaRPr lang="en-US" sz="1100" dirty="0"/>
+          </a:p>
+        </p:txBody>
+      </p:sp>
+      <p:sp>
+        <p:nvSpPr>
+          <p:cNvPr id="51" name="Text 48"/>
+          <p:cNvSpPr/>
+          <p:nvPr/>
+        </p:nvSpPr>
+        <p:spPr>
+          <a:xfrm>
+            <a:off x="9201150" y="3584448"/>
+            <a:ext cx="2393442" cy="548640"/>
+          </a:xfrm>
+          <a:prstGeom prst="rect">
+            <a:avLst/>
+          </a:prstGeom>
+          <a:noFill/>
+          <a:ln/>
+        </p:spPr>
+        <p:txBody>
+          <a:bodyPr wrap="square" rtlCol="0" anchor="ctr"/>
+          <a:lstStyle/>
+          <a:p>
+            <a:pPr indent="0" marL="0">
+              <a:buNone/>
+            </a:pPr>
+            <a:r>
+              <a:rPr lang="en-US" sz="1100" dirty="0">
+                <a:solidFill>
+                  <a:srgbClr val="444444"/>
+                </a:solidFill>
+                <a:latin typeface="微軟正黑體" pitchFamily="34" charset="0"/>
+                <a:ea typeface="微軟正黑體" pitchFamily="34" charset="-122"/>
+                <a:cs typeface="微軟正黑體" pitchFamily="34" charset="-120"/>
+              </a:rPr>
+              <a:t>▸  對話試問「查 Cloudflare R2 文件」</a:t>
+            </a:r>
+            <a:endParaRPr lang="en-US" sz="1100" dirty="0"/>
+          </a:p>
+        </p:txBody>
+      </p:sp>
+      <p:sp>
+        <p:nvSpPr>
+          <p:cNvPr id="52" name="Text 49"/>
+          <p:cNvSpPr/>
+          <p:nvPr/>
+        </p:nvSpPr>
+        <p:spPr>
+          <a:xfrm>
+            <a:off x="9201150" y="4178808"/>
+            <a:ext cx="2393442" cy="548640"/>
+          </a:xfrm>
+          <a:prstGeom prst="rect">
+            <a:avLst/>
+          </a:prstGeom>
+          <a:noFill/>
+          <a:ln/>
+        </p:spPr>
+        <p:txBody>
+          <a:bodyPr wrap="square" rtlCol="0" anchor="ctr"/>
+          <a:lstStyle/>
+          <a:p>
+            <a:pPr indent="0" marL="0">
+              <a:buNone/>
+            </a:pPr>
+            <a:r>
+              <a:rPr lang="en-US" sz="1100" dirty="0">
+                <a:solidFill>
+                  <a:srgbClr val="444444"/>
+                </a:solidFill>
+                <a:latin typeface="微軟正黑體" pitchFamily="34" charset="0"/>
+                <a:ea typeface="微軟正黑體" pitchFamily="34" charset="-122"/>
+                <a:cs typeface="微軟正黑體" pitchFamily="34" charset="-120"/>
+              </a:rPr>
+              <a:t>▸  AI 自動 routing 到 MCP</a:t>
+            </a:r>
+            <a:endParaRPr lang="en-US" sz="1100" dirty="0"/>
+          </a:p>
+        </p:txBody>
+      </p:sp>
+      <p:sp>
+        <p:nvSpPr>
+          <p:cNvPr id="53" name="Text 50"/>
+          <p:cNvSpPr/>
+          <p:nvPr/>
+        </p:nvSpPr>
+        <p:spPr>
+          <a:xfrm>
+            <a:off x="9201150" y="4773168"/>
+            <a:ext cx="2393442" cy="548640"/>
+          </a:xfrm>
+          <a:prstGeom prst="rect">
+            <a:avLst/>
+          </a:prstGeom>
+          <a:noFill/>
+          <a:ln/>
+        </p:spPr>
+        <p:txBody>
+          <a:bodyPr wrap="square" rtlCol="0" anchor="ctr"/>
+          <a:lstStyle/>
+          <a:p>
+            <a:pPr indent="0" marL="0">
+              <a:buNone/>
+            </a:pPr>
+            <a:r>
+              <a:rPr lang="en-US" sz="1100" dirty="0">
+                <a:solidFill>
+                  <a:srgbClr val="444444"/>
+                </a:solidFill>
+                <a:latin typeface="微軟正黑體" pitchFamily="34" charset="0"/>
+                <a:ea typeface="微軟正黑體" pitchFamily="34" charset="-122"/>
+                <a:cs typeface="微軟正黑體" pitchFamily="34" charset="-120"/>
+              </a:rPr>
+              <a:t>▸  看完整 agentic loop 過程</a:t>
+            </a:r>
+            <a:endParaRPr lang="en-US" sz="1100" dirty="0"/>
+          </a:p>
+        </p:txBody>
+      </p:sp>
+      <p:sp>
+        <p:nvSpPr>
+          <p:cNvPr id="54" name="Shape 51"/>
           <p:cNvSpPr/>
           <p:nvPr/>
         </p:nvSpPr>
@@ -5163,14 +5787,14 @@
             <a:avLst/>
           </a:prstGeom>
           <a:solidFill>
-            <a:srgbClr val="F38020"/>
+            <a:srgbClr val="1E2761"/>
           </a:solidFill>
           <a:ln/>
         </p:spPr>
       </p:sp>
       <p:sp>
         <p:nvSpPr>
-          <p:cNvPr id="39" name="Text 36"/>
+          <p:cNvPr id="55" name="Text 52"/>
           <p:cNvSpPr/>
           <p:nvPr/>
         </p:nvSpPr>
@@ -6557,7 +7181,7 @@
                 <a:ea typeface="微軟正黑體" pitchFamily="34" charset="-122"/>
                 <a:cs typeface="微軟正黑體" pitchFamily="34" charset="-120"/>
               </a:rPr>
-              <a:t>聯絡：service@leyun.cloud · +886-2-77220055 · www.leyun.cloud · 講師 victor@leyun.com.tw</a:t>
+              <a:t>聯絡：service@leyun.cloud · +886-2-77220055 · www.leyun.cloud · 講師 victor@leyun.cloud</a:t>
             </a:r>
             <a:endParaRPr lang="en-US" sz="1100" dirty="0"/>
           </a:p>
@@ -6933,7 +7557,7 @@
                 <a:ea typeface="微軟正黑體" pitchFamily="34" charset="-122"/>
                 <a:cs typeface="微軟正黑體" pitchFamily="34" charset="-120"/>
               </a:rPr>
-              <a:t>victor@leyun.com.tw</a:t>
+              <a:t>victor@leyun.cloud</a:t>
             </a:r>
             <a:endParaRPr lang="en-US" sz="1400" dirty="0"/>
           </a:p>

--- a/slides/aigw-course.pptx
+++ b/slides/aigw-course.pptx
@@ -2786,7 +2786,7 @@
               <a:buNone/>
             </a:pPr>
             <a:r>
-              <a:rPr lang="en-US" sz="2600" b="1" dirty="0">
+              <a:rPr lang="en-US" sz="2000" b="1" dirty="0">
                 <a:solidFill>
                   <a:srgbClr val="F38020"/>
                 </a:solidFill>
@@ -2800,7 +2800,7 @@
               <a:buNone/>
             </a:pPr>
             <a:r>
-              <a:rPr lang="en-US" sz="2600" b="1" dirty="0">
+              <a:rPr lang="en-US" sz="2000" b="1" dirty="0">
                 <a:solidFill>
                   <a:srgbClr val="B0B0B0"/>
                 </a:solidFill>
@@ -2814,7 +2814,7 @@
               <a:buNone/>
             </a:pPr>
             <a:r>
-              <a:rPr lang="en-US" sz="2600" b="1" dirty="0">
+              <a:rPr lang="en-US" sz="2000" b="1" dirty="0">
                 <a:solidFill>
                   <a:srgbClr val="1A1A1A"/>
                 </a:solidFill>
@@ -2824,7 +2824,7 @@
               </a:rPr>
               <a:t>MCP 工具呼叫流程：AI 怎麼知道要打哪個工具？</a:t>
             </a:r>
-            <a:endParaRPr lang="en-US" sz="2600" dirty="0"/>
+            <a:endParaRPr lang="en-US" sz="2000" dirty="0"/>
           </a:p>
         </p:txBody>
       </p:sp>
@@ -2836,8 +2836,8 @@
         </p:nvSpPr>
         <p:spPr>
           <a:xfrm>
-            <a:off x="457200" y="886968"/>
-            <a:ext cx="7095744" cy="137160"/>
+            <a:off x="457200" y="1042416"/>
+            <a:ext cx="6254496" cy="109728"/>
           </a:xfrm>
           <a:prstGeom prst="rect">
             <a:avLst/>
@@ -2858,8 +2858,8 @@
         </p:nvSpPr>
         <p:spPr>
           <a:xfrm>
-            <a:off x="457200" y="1097280"/>
-            <a:ext cx="8686800" cy="320040"/>
+            <a:off x="457200" y="1225296"/>
+            <a:ext cx="8686800" cy="292608"/>
           </a:xfrm>
           <a:prstGeom prst="rect">
             <a:avLst/>
@@ -4121,7 +4121,7 @@
               <a:buNone/>
             </a:pPr>
             <a:r>
-              <a:rPr lang="en-US" sz="2600" b="1" dirty="0">
+              <a:rPr lang="en-US" sz="2200" b="1" dirty="0">
                 <a:solidFill>
                   <a:srgbClr val="F38020"/>
                 </a:solidFill>
@@ -4135,7 +4135,7 @@
               <a:buNone/>
             </a:pPr>
             <a:r>
-              <a:rPr lang="en-US" sz="2600" b="1" dirty="0">
+              <a:rPr lang="en-US" sz="2200" b="1" dirty="0">
                 <a:solidFill>
                   <a:srgbClr val="B0B0B0"/>
                 </a:solidFill>
@@ -4149,7 +4149,7 @@
               <a:buNone/>
             </a:pPr>
             <a:r>
-              <a:rPr lang="en-US" sz="2600" b="1" dirty="0">
+              <a:rPr lang="en-US" sz="2200" b="1" dirty="0">
                 <a:solidFill>
                   <a:srgbClr val="1A1A1A"/>
                 </a:solidFill>
@@ -4159,7 +4159,7 @@
               </a:rPr>
               <a:t>4 階段部署 — 跟著做就完成</a:t>
             </a:r>
-            <a:endParaRPr lang="en-US" sz="2600" dirty="0"/>
+            <a:endParaRPr lang="en-US" sz="2200" dirty="0"/>
           </a:p>
         </p:txBody>
       </p:sp>
@@ -4171,8 +4171,8 @@
         </p:nvSpPr>
         <p:spPr>
           <a:xfrm>
-            <a:off x="457200" y="886968"/>
-            <a:ext cx="4901184" cy="137160"/>
+            <a:off x="457200" y="1042416"/>
+            <a:ext cx="4334256" cy="109728"/>
           </a:xfrm>
           <a:prstGeom prst="rect">
             <a:avLst/>
@@ -4193,8 +4193,8 @@
         </p:nvSpPr>
         <p:spPr>
           <a:xfrm>
-            <a:off x="457200" y="1097280"/>
-            <a:ext cx="8686800" cy="320040"/>
+            <a:off x="457200" y="1225296"/>
+            <a:ext cx="8686800" cy="292608"/>
           </a:xfrm>
           <a:prstGeom prst="rect">
             <a:avLst/>
@@ -4271,8 +4271,8 @@
         </p:nvSpPr>
         <p:spPr>
           <a:xfrm>
-            <a:off x="457200" y="1572768"/>
-            <a:ext cx="2667762" cy="4983480"/>
+            <a:off x="457200" y="1645920"/>
+            <a:ext cx="2667762" cy="4709160"/>
           </a:xfrm>
           <a:prstGeom prst="rect">
             <a:avLst/>
@@ -4296,7 +4296,7 @@
         </p:nvSpPr>
         <p:spPr>
           <a:xfrm>
-            <a:off x="457200" y="1572768"/>
+            <a:off x="457200" y="1645920"/>
             <a:ext cx="2667762" cy="530352"/>
           </a:xfrm>
           <a:prstGeom prst="rect">
@@ -4316,7 +4316,7 @@
         </p:nvSpPr>
         <p:spPr>
           <a:xfrm>
-            <a:off x="457200" y="1572768"/>
+            <a:off x="457200" y="1645920"/>
             <a:ext cx="1200493" cy="530352"/>
           </a:xfrm>
           <a:prstGeom prst="rect">
@@ -4355,7 +4355,7 @@
         </p:nvSpPr>
         <p:spPr>
           <a:xfrm>
-            <a:off x="1657693" y="1572768"/>
+            <a:off x="1657693" y="1645920"/>
             <a:ext cx="1467269" cy="530352"/>
           </a:xfrm>
           <a:prstGeom prst="rect">
@@ -4394,7 +4394,7 @@
         </p:nvSpPr>
         <p:spPr>
           <a:xfrm>
-            <a:off x="594360" y="2194560"/>
+            <a:off x="594360" y="2267712"/>
             <a:ext cx="2393442" cy="384048"/>
           </a:xfrm>
           <a:prstGeom prst="rect">
@@ -4433,7 +4433,7 @@
         </p:nvSpPr>
         <p:spPr>
           <a:xfrm>
-            <a:off x="594360" y="2990088"/>
+            <a:off x="594360" y="3063240"/>
             <a:ext cx="2393442" cy="548640"/>
           </a:xfrm>
           <a:prstGeom prst="rect">
@@ -4472,7 +4472,7 @@
         </p:nvSpPr>
         <p:spPr>
           <a:xfrm>
-            <a:off x="594360" y="3584448"/>
+            <a:off x="594360" y="3657600"/>
             <a:ext cx="2393442" cy="548640"/>
           </a:xfrm>
           <a:prstGeom prst="rect">
@@ -4511,7 +4511,7 @@
         </p:nvSpPr>
         <p:spPr>
           <a:xfrm>
-            <a:off x="594360" y="4178808"/>
+            <a:off x="594360" y="4251960"/>
             <a:ext cx="2393442" cy="548640"/>
           </a:xfrm>
           <a:prstGeom prst="rect">
@@ -4550,7 +4550,7 @@
         </p:nvSpPr>
         <p:spPr>
           <a:xfrm>
-            <a:off x="594360" y="4773168"/>
+            <a:off x="594360" y="4846320"/>
             <a:ext cx="2393442" cy="548640"/>
           </a:xfrm>
           <a:prstGeom prst="rect">
@@ -4589,7 +4589,7 @@
         </p:nvSpPr>
         <p:spPr>
           <a:xfrm>
-            <a:off x="594360" y="6080760"/>
+            <a:off x="594360" y="5879592"/>
             <a:ext cx="2393442" cy="384048"/>
           </a:xfrm>
           <a:prstGeom prst="rect">
@@ -4609,7 +4609,7 @@
         </p:nvSpPr>
         <p:spPr>
           <a:xfrm>
-            <a:off x="594360" y="6080760"/>
+            <a:off x="594360" y="5879592"/>
             <a:ext cx="2393442" cy="384048"/>
           </a:xfrm>
           <a:prstGeom prst="rect">
@@ -4648,7 +4648,7 @@
         </p:nvSpPr>
         <p:spPr>
           <a:xfrm rot="5400000">
-            <a:off x="3124962" y="3918204"/>
+            <a:off x="3124962" y="3854196"/>
             <a:ext cx="201168" cy="292608"/>
           </a:xfrm>
           <a:prstGeom prst="triangle">
@@ -4668,8 +4668,8 @@
         </p:nvSpPr>
         <p:spPr>
           <a:xfrm>
-            <a:off x="3326130" y="1572768"/>
-            <a:ext cx="2667762" cy="4983480"/>
+            <a:off x="3326130" y="1645920"/>
+            <a:ext cx="2667762" cy="4709160"/>
           </a:xfrm>
           <a:prstGeom prst="rect">
             <a:avLst/>
@@ -4693,7 +4693,7 @@
         </p:nvSpPr>
         <p:spPr>
           <a:xfrm>
-            <a:off x="3326130" y="1572768"/>
+            <a:off x="3326130" y="1645920"/>
             <a:ext cx="2667762" cy="530352"/>
           </a:xfrm>
           <a:prstGeom prst="rect">
@@ -4713,7 +4713,7 @@
         </p:nvSpPr>
         <p:spPr>
           <a:xfrm>
-            <a:off x="3326130" y="1572768"/>
+            <a:off x="3326130" y="1645920"/>
             <a:ext cx="1200493" cy="530352"/>
           </a:xfrm>
           <a:prstGeom prst="rect">
@@ -4752,7 +4752,7 @@
         </p:nvSpPr>
         <p:spPr>
           <a:xfrm>
-            <a:off x="4526623" y="1572768"/>
+            <a:off x="4526623" y="1645920"/>
             <a:ext cx="1467269" cy="530352"/>
           </a:xfrm>
           <a:prstGeom prst="rect">
@@ -4791,7 +4791,7 @@
         </p:nvSpPr>
         <p:spPr>
           <a:xfrm>
-            <a:off x="3463290" y="2194560"/>
+            <a:off x="3463290" y="2267712"/>
             <a:ext cx="2393442" cy="384048"/>
           </a:xfrm>
           <a:prstGeom prst="rect">
@@ -4830,7 +4830,7 @@
         </p:nvSpPr>
         <p:spPr>
           <a:xfrm>
-            <a:off x="3463290" y="2990088"/>
+            <a:off x="3463290" y="3063240"/>
             <a:ext cx="2393442" cy="548640"/>
           </a:xfrm>
           <a:prstGeom prst="rect">
@@ -4869,7 +4869,7 @@
         </p:nvSpPr>
         <p:spPr>
           <a:xfrm>
-            <a:off x="3463290" y="3584448"/>
+            <a:off x="3463290" y="3657600"/>
             <a:ext cx="2393442" cy="548640"/>
           </a:xfrm>
           <a:prstGeom prst="rect">
@@ -4908,7 +4908,7 @@
         </p:nvSpPr>
         <p:spPr>
           <a:xfrm>
-            <a:off x="3463290" y="4178808"/>
+            <a:off x="3463290" y="4251960"/>
             <a:ext cx="2393442" cy="548640"/>
           </a:xfrm>
           <a:prstGeom prst="rect">
@@ -4947,7 +4947,7 @@
         </p:nvSpPr>
         <p:spPr>
           <a:xfrm>
-            <a:off x="3463290" y="4773168"/>
+            <a:off x="3463290" y="4846320"/>
             <a:ext cx="2393442" cy="548640"/>
           </a:xfrm>
           <a:prstGeom prst="rect">
@@ -4986,7 +4986,7 @@
         </p:nvSpPr>
         <p:spPr>
           <a:xfrm>
-            <a:off x="3463290" y="6080760"/>
+            <a:off x="3463290" y="5879592"/>
             <a:ext cx="2393442" cy="384048"/>
           </a:xfrm>
           <a:prstGeom prst="rect">
@@ -5006,7 +5006,7 @@
         </p:nvSpPr>
         <p:spPr>
           <a:xfrm>
-            <a:off x="3463290" y="6080760"/>
+            <a:off x="3463290" y="5879592"/>
             <a:ext cx="2393442" cy="384048"/>
           </a:xfrm>
           <a:prstGeom prst="rect">
@@ -5045,7 +5045,7 @@
         </p:nvSpPr>
         <p:spPr>
           <a:xfrm rot="5400000">
-            <a:off x="5993892" y="3918204"/>
+            <a:off x="5993892" y="3854196"/>
             <a:ext cx="201168" cy="292608"/>
           </a:xfrm>
           <a:prstGeom prst="triangle">
@@ -5065,8 +5065,8 @@
         </p:nvSpPr>
         <p:spPr>
           <a:xfrm>
-            <a:off x="6195060" y="1572768"/>
-            <a:ext cx="2667762" cy="4983480"/>
+            <a:off x="6195060" y="1645920"/>
+            <a:ext cx="2667762" cy="4709160"/>
           </a:xfrm>
           <a:prstGeom prst="rect">
             <a:avLst/>
@@ -5090,7 +5090,7 @@
         </p:nvSpPr>
         <p:spPr>
           <a:xfrm>
-            <a:off x="6195060" y="1572768"/>
+            <a:off x="6195060" y="1645920"/>
             <a:ext cx="2667762" cy="530352"/>
           </a:xfrm>
           <a:prstGeom prst="rect">
@@ -5110,7 +5110,7 @@
         </p:nvSpPr>
         <p:spPr>
           <a:xfrm>
-            <a:off x="6195060" y="1572768"/>
+            <a:off x="6195060" y="1645920"/>
             <a:ext cx="1200493" cy="530352"/>
           </a:xfrm>
           <a:prstGeom prst="rect">
@@ -5149,7 +5149,7 @@
         </p:nvSpPr>
         <p:spPr>
           <a:xfrm>
-            <a:off x="7395553" y="1572768"/>
+            <a:off x="7395553" y="1645920"/>
             <a:ext cx="1467269" cy="530352"/>
           </a:xfrm>
           <a:prstGeom prst="rect">
@@ -5188,7 +5188,7 @@
         </p:nvSpPr>
         <p:spPr>
           <a:xfrm>
-            <a:off x="6332220" y="2194560"/>
+            <a:off x="6332220" y="2267712"/>
             <a:ext cx="2393442" cy="384048"/>
           </a:xfrm>
           <a:prstGeom prst="rect">
@@ -5227,7 +5227,7 @@
         </p:nvSpPr>
         <p:spPr>
           <a:xfrm>
-            <a:off x="6332220" y="2990088"/>
+            <a:off x="6332220" y="3063240"/>
             <a:ext cx="2393442" cy="548640"/>
           </a:xfrm>
           <a:prstGeom prst="rect">
@@ -5266,7 +5266,7 @@
         </p:nvSpPr>
         <p:spPr>
           <a:xfrm>
-            <a:off x="6332220" y="3584448"/>
+            <a:off x="6332220" y="3657600"/>
             <a:ext cx="2393442" cy="548640"/>
           </a:xfrm>
           <a:prstGeom prst="rect">
@@ -5305,7 +5305,7 @@
         </p:nvSpPr>
         <p:spPr>
           <a:xfrm>
-            <a:off x="6332220" y="4178808"/>
+            <a:off x="6332220" y="4251960"/>
             <a:ext cx="2393442" cy="548640"/>
           </a:xfrm>
           <a:prstGeom prst="rect">
@@ -5344,7 +5344,7 @@
         </p:nvSpPr>
         <p:spPr>
           <a:xfrm>
-            <a:off x="6332220" y="4773168"/>
+            <a:off x="6332220" y="4846320"/>
             <a:ext cx="2393442" cy="548640"/>
           </a:xfrm>
           <a:prstGeom prst="rect">
@@ -5383,7 +5383,7 @@
         </p:nvSpPr>
         <p:spPr>
           <a:xfrm>
-            <a:off x="6332220" y="6080760"/>
+            <a:off x="6332220" y="5879592"/>
             <a:ext cx="2393442" cy="384048"/>
           </a:xfrm>
           <a:prstGeom prst="rect">
@@ -5403,7 +5403,7 @@
         </p:nvSpPr>
         <p:spPr>
           <a:xfrm>
-            <a:off x="6332220" y="6080760"/>
+            <a:off x="6332220" y="5879592"/>
             <a:ext cx="2393442" cy="384048"/>
           </a:xfrm>
           <a:prstGeom prst="rect">
@@ -5442,7 +5442,7 @@
         </p:nvSpPr>
         <p:spPr>
           <a:xfrm rot="5400000">
-            <a:off x="8862822" y="3918204"/>
+            <a:off x="8862822" y="3854196"/>
             <a:ext cx="201168" cy="292608"/>
           </a:xfrm>
           <a:prstGeom prst="triangle">
@@ -5462,8 +5462,8 @@
         </p:nvSpPr>
         <p:spPr>
           <a:xfrm>
-            <a:off x="9063990" y="1572768"/>
-            <a:ext cx="2667762" cy="4983480"/>
+            <a:off x="9063990" y="1645920"/>
+            <a:ext cx="2667762" cy="4709160"/>
           </a:xfrm>
           <a:prstGeom prst="rect">
             <a:avLst/>
@@ -5487,7 +5487,7 @@
         </p:nvSpPr>
         <p:spPr>
           <a:xfrm>
-            <a:off x="9063990" y="1572768"/>
+            <a:off x="9063990" y="1645920"/>
             <a:ext cx="2667762" cy="530352"/>
           </a:xfrm>
           <a:prstGeom prst="rect">
@@ -5507,7 +5507,7 @@
         </p:nvSpPr>
         <p:spPr>
           <a:xfrm>
-            <a:off x="9063990" y="1572768"/>
+            <a:off x="9063990" y="1645920"/>
             <a:ext cx="1200493" cy="530352"/>
           </a:xfrm>
           <a:prstGeom prst="rect">
@@ -5546,7 +5546,7 @@
         </p:nvSpPr>
         <p:spPr>
           <a:xfrm>
-            <a:off x="10264483" y="1572768"/>
+            <a:off x="10264483" y="1645920"/>
             <a:ext cx="1467269" cy="530352"/>
           </a:xfrm>
           <a:prstGeom prst="rect">
@@ -5585,7 +5585,7 @@
         </p:nvSpPr>
         <p:spPr>
           <a:xfrm>
-            <a:off x="9201150" y="2194560"/>
+            <a:off x="9201150" y="2267712"/>
             <a:ext cx="2393442" cy="384048"/>
           </a:xfrm>
           <a:prstGeom prst="rect">
@@ -5624,7 +5624,7 @@
         </p:nvSpPr>
         <p:spPr>
           <a:xfrm>
-            <a:off x="9201150" y="2990088"/>
+            <a:off x="9201150" y="3063240"/>
             <a:ext cx="2393442" cy="548640"/>
           </a:xfrm>
           <a:prstGeom prst="rect">
@@ -5663,7 +5663,7 @@
         </p:nvSpPr>
         <p:spPr>
           <a:xfrm>
-            <a:off x="9201150" y="3584448"/>
+            <a:off x="9201150" y="3657600"/>
             <a:ext cx="2393442" cy="548640"/>
           </a:xfrm>
           <a:prstGeom prst="rect">
@@ -5702,7 +5702,7 @@
         </p:nvSpPr>
         <p:spPr>
           <a:xfrm>
-            <a:off x="9201150" y="4178808"/>
+            <a:off x="9201150" y="4251960"/>
             <a:ext cx="2393442" cy="548640"/>
           </a:xfrm>
           <a:prstGeom prst="rect">
@@ -5741,7 +5741,7 @@
         </p:nvSpPr>
         <p:spPr>
           <a:xfrm>
-            <a:off x="9201150" y="4773168"/>
+            <a:off x="9201150" y="4846320"/>
             <a:ext cx="2393442" cy="548640"/>
           </a:xfrm>
           <a:prstGeom prst="rect">
@@ -5780,7 +5780,7 @@
         </p:nvSpPr>
         <p:spPr>
           <a:xfrm>
-            <a:off x="9201150" y="6080760"/>
+            <a:off x="9201150" y="5879592"/>
             <a:ext cx="2393442" cy="384048"/>
           </a:xfrm>
           <a:prstGeom prst="rect">
@@ -5800,7 +5800,7 @@
         </p:nvSpPr>
         <p:spPr>
           <a:xfrm>
-            <a:off x="9201150" y="6080760"/>
+            <a:off x="9201150" y="5879592"/>
             <a:ext cx="2393442" cy="384048"/>
           </a:xfrm>
           <a:prstGeom prst="rect">
@@ -5964,7 +5964,7 @@
               <a:buNone/>
             </a:pPr>
             <a:r>
-              <a:rPr lang="en-US" sz="2600" b="1" dirty="0">
+              <a:rPr lang="en-US" sz="2400" b="1" dirty="0">
                 <a:solidFill>
                   <a:srgbClr val="F38020"/>
                 </a:solidFill>
@@ -5978,7 +5978,7 @@
               <a:buNone/>
             </a:pPr>
             <a:r>
-              <a:rPr lang="en-US" sz="2600" b="1" dirty="0">
+              <a:rPr lang="en-US" sz="2400" b="1" dirty="0">
                 <a:solidFill>
                   <a:srgbClr val="B0B0B0"/>
                 </a:solidFill>
@@ -5992,7 +5992,7 @@
               <a:buNone/>
             </a:pPr>
             <a:r>
-              <a:rPr lang="en-US" sz="2600" b="1" dirty="0">
+              <a:rPr lang="en-US" sz="2400" b="1" dirty="0">
                 <a:solidFill>
                   <a:srgbClr val="1A1A1A"/>
                 </a:solidFill>
@@ -6000,9 +6000,9 @@
                 <a:ea typeface="微軟正黑體" pitchFamily="34" charset="-122"/>
                 <a:cs typeface="微軟正黑體" pitchFamily="34" charset="-120"/>
               </a:rPr>
-              <a:t>延伸自學地圖 + 樂雲商用方案</a:t>
-            </a:r>
-            <a:endParaRPr lang="en-US" sz="2600" dirty="0"/>
+              <a:t>延伸自學地圖 + 研究議題</a:t>
+            </a:r>
+            <a:endParaRPr lang="en-US" sz="2400" dirty="0"/>
           </a:p>
         </p:txBody>
       </p:sp>
@@ -6014,8 +6014,8 @@
         </p:nvSpPr>
         <p:spPr>
           <a:xfrm>
-            <a:off x="457200" y="886968"/>
-            <a:ext cx="4169664" cy="137160"/>
+            <a:off x="457200" y="1042416"/>
+            <a:ext cx="3438144" cy="109728"/>
           </a:xfrm>
           <a:prstGeom prst="rect">
             <a:avLst/>
@@ -6036,8 +6036,8 @@
         </p:nvSpPr>
         <p:spPr>
           <a:xfrm>
-            <a:off x="457200" y="1097280"/>
-            <a:ext cx="8686800" cy="320040"/>
+            <a:off x="457200" y="1225296"/>
+            <a:ext cx="8686800" cy="292608"/>
           </a:xfrm>
           <a:prstGeom prst="rect">
             <a:avLst/>
@@ -6061,7 +6061,7 @@
                 <a:ea typeface="微軟正黑體" pitchFamily="34" charset="-122"/>
                 <a:cs typeface="微軟正黑體" pitchFamily="34" charset="-120"/>
               </a:rPr>
-              <a:t>今天教的是免費自建版本 — 樂雲提供企業級進階版本與整合服務</a:t>
+              <a:t>從 Repo 出發 — 課後可以自己玩到什麼程度，以及學術界正在做的相關研究</a:t>
             </a:r>
             <a:endParaRPr lang="en-US" sz="1300" dirty="0"/>
           </a:p>
@@ -6114,7 +6114,7 @@
         </p:nvSpPr>
         <p:spPr>
           <a:xfrm>
-            <a:off x="457200" y="1508760"/>
+            <a:off x="457200" y="1783080"/>
             <a:ext cx="5577840" cy="365760"/>
           </a:xfrm>
           <a:prstGeom prst="rect">
@@ -6139,7 +6139,7 @@
                 <a:ea typeface="微軟正黑體" pitchFamily="34" charset="-122"/>
                 <a:cs typeface="微軟正黑體" pitchFamily="34" charset="-120"/>
               </a:rPr>
-              <a:t>🚀  延伸自學方向（免費）</a:t>
+              <a:t>🚀  工程延伸（直接動手）</a:t>
             </a:r>
             <a:endParaRPr lang="en-US" sz="1600" dirty="0"/>
           </a:p>
@@ -6153,7 +6153,7 @@
         </p:nvSpPr>
         <p:spPr>
           <a:xfrm>
-            <a:off x="457200" y="2011680"/>
+            <a:off x="457200" y="2286000"/>
             <a:ext cx="91440" cy="502920"/>
           </a:xfrm>
           <a:prstGeom prst="rect">
@@ -6173,8 +6173,8 @@
         </p:nvSpPr>
         <p:spPr>
           <a:xfrm>
-            <a:off x="685800" y="2011680"/>
-            <a:ext cx="1371600" cy="502920"/>
+            <a:off x="685800" y="2286000"/>
+            <a:ext cx="1463040" cy="502920"/>
           </a:xfrm>
           <a:prstGeom prst="rect">
             <a:avLst/>
@@ -6212,24 +6212,24 @@
         </p:nvSpPr>
         <p:spPr>
           <a:xfrm>
-            <a:off x="2103120" y="2011680"/>
-            <a:ext cx="3931920" cy="502920"/>
-          </a:xfrm>
-          <a:prstGeom prst="rect">
-            <a:avLst/>
-          </a:prstGeom>
-          <a:noFill/>
-          <a:ln/>
-        </p:spPr>
-        <p:txBody>
-          <a:bodyPr wrap="square" rtlCol="0" anchor="ctr"/>
-          <a:lstStyle/>
-          <a:p>
-            <a:pPr indent="0" marL="0">
-              <a:buNone/>
-            </a:pPr>
-            <a:r>
-              <a:rPr lang="en-US" sz="1150" dirty="0">
+            <a:off x="2194560" y="2286000"/>
+            <a:ext cx="3840480" cy="502920"/>
+          </a:xfrm>
+          <a:prstGeom prst="rect">
+            <a:avLst/>
+          </a:prstGeom>
+          <a:noFill/>
+          <a:ln/>
+        </p:spPr>
+        <p:txBody>
+          <a:bodyPr wrap="square" rtlCol="0" anchor="ctr"/>
+          <a:lstStyle/>
+          <a:p>
+            <a:pPr indent="0" marL="0">
+              <a:buNone/>
+            </a:pPr>
+            <a:r>
+              <a:rPr lang="en-US" sz="1100" dirty="0">
                 <a:solidFill>
                   <a:srgbClr val="444444"/>
                 </a:solidFill>
@@ -6237,9 +6237,9 @@
                 <a:ea typeface="微軟正黑體" pitchFamily="34" charset="-122"/>
                 <a:cs typeface="微軟正黑體" pitchFamily="34" charset="-120"/>
               </a:rPr>
-              <a:t>Vectorize index + @cf/baai/bge embeddings，讓 AI 查內部文件</a:t>
-            </a:r>
-            <a:endParaRPr lang="en-US" sz="1150" dirty="0"/>
+              <a:t>Vectorize index + @cf/baai/bge embeddings，AI 查內部文件</a:t>
+            </a:r>
+            <a:endParaRPr lang="en-US" sz="1100" dirty="0"/>
           </a:p>
         </p:txBody>
       </p:sp>
@@ -6251,7 +6251,7 @@
         </p:nvSpPr>
         <p:spPr>
           <a:xfrm>
-            <a:off x="457200" y="2651760"/>
+            <a:off x="457200" y="2926080"/>
             <a:ext cx="91440" cy="502920"/>
           </a:xfrm>
           <a:prstGeom prst="rect">
@@ -6271,8 +6271,8 @@
         </p:nvSpPr>
         <p:spPr>
           <a:xfrm>
-            <a:off x="685800" y="2651760"/>
-            <a:ext cx="1371600" cy="502920"/>
+            <a:off x="685800" y="2926080"/>
+            <a:ext cx="1463040" cy="502920"/>
           </a:xfrm>
           <a:prstGeom prst="rect">
             <a:avLst/>
@@ -6310,24 +6310,24 @@
         </p:nvSpPr>
         <p:spPr>
           <a:xfrm>
-            <a:off x="2103120" y="2651760"/>
-            <a:ext cx="3931920" cy="502920"/>
-          </a:xfrm>
-          <a:prstGeom prst="rect">
-            <a:avLst/>
-          </a:prstGeom>
-          <a:noFill/>
-          <a:ln/>
-        </p:spPr>
-        <p:txBody>
-          <a:bodyPr wrap="square" rtlCol="0" anchor="ctr"/>
-          <a:lstStyle/>
-          <a:p>
-            <a:pPr indent="0" marL="0">
-              <a:buNone/>
-            </a:pPr>
-            <a:r>
-              <a:rPr lang="en-US" sz="1150" dirty="0">
+            <a:off x="2194560" y="2926080"/>
+            <a:ext cx="3840480" cy="502920"/>
+          </a:xfrm>
+          <a:prstGeom prst="rect">
+            <a:avLst/>
+          </a:prstGeom>
+          <a:noFill/>
+          <a:ln/>
+        </p:spPr>
+        <p:txBody>
+          <a:bodyPr wrap="square" rtlCol="0" anchor="ctr"/>
+          <a:lstStyle/>
+          <a:p>
+            <a:pPr indent="0" marL="0">
+              <a:buNone/>
+            </a:pPr>
+            <a:r>
+              <a:rPr lang="en-US" sz="1100" dirty="0">
                 <a:solidFill>
                   <a:srgbClr val="444444"/>
                 </a:solidFill>
@@ -6337,7 +6337,7 @@
               </a:rPr>
               <a:t>fetch + ReadableStream，前端打字機效果</a:t>
             </a:r>
-            <a:endParaRPr lang="en-US" sz="1150" dirty="0"/>
+            <a:endParaRPr lang="en-US" sz="1100" dirty="0"/>
           </a:p>
         </p:txBody>
       </p:sp>
@@ -6349,7 +6349,7 @@
         </p:nvSpPr>
         <p:spPr>
           <a:xfrm>
-            <a:off x="457200" y="3291840"/>
+            <a:off x="457200" y="3566160"/>
             <a:ext cx="91440" cy="502920"/>
           </a:xfrm>
           <a:prstGeom prst="rect">
@@ -6369,8 +6369,8 @@
         </p:nvSpPr>
         <p:spPr>
           <a:xfrm>
-            <a:off x="685800" y="3291840"/>
-            <a:ext cx="1371600" cy="502920"/>
+            <a:off x="685800" y="3566160"/>
+            <a:ext cx="1463040" cy="502920"/>
           </a:xfrm>
           <a:prstGeom prst="rect">
             <a:avLst/>
@@ -6408,24 +6408,24 @@
         </p:nvSpPr>
         <p:spPr>
           <a:xfrm>
-            <a:off x="2103120" y="3291840"/>
-            <a:ext cx="3931920" cy="502920"/>
-          </a:xfrm>
-          <a:prstGeom prst="rect">
-            <a:avLst/>
-          </a:prstGeom>
-          <a:noFill/>
-          <a:ln/>
-        </p:spPr>
-        <p:txBody>
-          <a:bodyPr wrap="square" rtlCol="0" anchor="ctr"/>
-          <a:lstStyle/>
-          <a:p>
-            <a:pPr indent="0" marL="0">
-              <a:buNone/>
-            </a:pPr>
-            <a:r>
-              <a:rPr lang="en-US" sz="1150" dirty="0">
+            <a:off x="2194560" y="3566160"/>
+            <a:ext cx="3840480" cy="502920"/>
+          </a:xfrm>
+          <a:prstGeom prst="rect">
+            <a:avLst/>
+          </a:prstGeom>
+          <a:noFill/>
+          <a:ln/>
+        </p:spPr>
+        <p:txBody>
+          <a:bodyPr wrap="square" rtlCol="0" anchor="ctr"/>
+          <a:lstStyle/>
+          <a:p>
+            <a:pPr indent="0" marL="0">
+              <a:buNone/>
+            </a:pPr>
+            <a:r>
+              <a:rPr lang="en-US" sz="1100" dirty="0">
                 <a:solidFill>
                   <a:srgbClr val="444444"/>
                 </a:solidFill>
@@ -6433,9 +6433,9 @@
                 <a:ea typeface="微軟正黑體" pitchFamily="34" charset="-122"/>
                 <a:cs typeface="微軟正黑體" pitchFamily="34" charset="-120"/>
               </a:rPr>
-              <a:t>多開一個 worker 接 webhook，AI 即可進 LINE/TG</a:t>
-            </a:r>
-            <a:endParaRPr lang="en-US" sz="1150" dirty="0"/>
+              <a:t>多開一個 worker 接 webhook，AI 進 LINE / TG</a:t>
+            </a:r>
+            <a:endParaRPr lang="en-US" sz="1100" dirty="0"/>
           </a:p>
         </p:txBody>
       </p:sp>
@@ -6447,7 +6447,7 @@
         </p:nvSpPr>
         <p:spPr>
           <a:xfrm>
-            <a:off x="457200" y="3931920"/>
+            <a:off x="457200" y="4206240"/>
             <a:ext cx="91440" cy="502920"/>
           </a:xfrm>
           <a:prstGeom prst="rect">
@@ -6467,8 +6467,8 @@
         </p:nvSpPr>
         <p:spPr>
           <a:xfrm>
-            <a:off x="685800" y="3931920"/>
-            <a:ext cx="1371600" cy="502920"/>
+            <a:off x="685800" y="4206240"/>
+            <a:ext cx="1463040" cy="502920"/>
           </a:xfrm>
           <a:prstGeom prst="rect">
             <a:avLst/>
@@ -6506,24 +6506,24 @@
         </p:nvSpPr>
         <p:spPr>
           <a:xfrm>
-            <a:off x="2103120" y="3931920"/>
-            <a:ext cx="3931920" cy="502920"/>
-          </a:xfrm>
-          <a:prstGeom prst="rect">
-            <a:avLst/>
-          </a:prstGeom>
-          <a:noFill/>
-          <a:ln/>
-        </p:spPr>
-        <p:txBody>
-          <a:bodyPr wrap="square" rtlCol="0" anchor="ctr"/>
-          <a:lstStyle/>
-          <a:p>
-            <a:pPr indent="0" marL="0">
-              <a:buNone/>
-            </a:pPr>
-            <a:r>
-              <a:rPr lang="en-US" sz="1150" dirty="0">
+            <a:off x="2194560" y="4206240"/>
+            <a:ext cx="3840480" cy="502920"/>
+          </a:xfrm>
+          <a:prstGeom prst="rect">
+            <a:avLst/>
+          </a:prstGeom>
+          <a:noFill/>
+          <a:ln/>
+        </p:spPr>
+        <p:txBody>
+          <a:bodyPr wrap="square" rtlCol="0" anchor="ctr"/>
+          <a:lstStyle/>
+          <a:p>
+            <a:pPr indent="0" marL="0">
+              <a:buNone/>
+            </a:pPr>
+            <a:r>
+              <a:rPr lang="en-US" sz="1100" dirty="0">
                 <a:solidFill>
                   <a:srgbClr val="444444"/>
                 </a:solidFill>
@@ -6533,7 +6533,7 @@
               </a:rPr>
               <a:t>users 加 tenant_id，policy 依租戶隔離</a:t>
             </a:r>
-            <a:endParaRPr lang="en-US" sz="1150" dirty="0"/>
+            <a:endParaRPr lang="en-US" sz="1100" dirty="0"/>
           </a:p>
         </p:txBody>
       </p:sp>
@@ -6545,7 +6545,7 @@
         </p:nvSpPr>
         <p:spPr>
           <a:xfrm>
-            <a:off x="457200" y="4572000"/>
+            <a:off x="457200" y="4846320"/>
             <a:ext cx="91440" cy="502920"/>
           </a:xfrm>
           <a:prstGeom prst="rect">
@@ -6565,8 +6565,8 @@
         </p:nvSpPr>
         <p:spPr>
           <a:xfrm>
-            <a:off x="685800" y="4572000"/>
-            <a:ext cx="1371600" cy="502920"/>
+            <a:off x="685800" y="4846320"/>
+            <a:ext cx="1463040" cy="502920"/>
           </a:xfrm>
           <a:prstGeom prst="rect">
             <a:avLst/>
@@ -6604,24 +6604,24 @@
         </p:nvSpPr>
         <p:spPr>
           <a:xfrm>
-            <a:off x="2103120" y="4572000"/>
-            <a:ext cx="3931920" cy="502920"/>
-          </a:xfrm>
-          <a:prstGeom prst="rect">
-            <a:avLst/>
-          </a:prstGeom>
-          <a:noFill/>
-          <a:ln/>
-        </p:spPr>
-        <p:txBody>
-          <a:bodyPr wrap="square" rtlCol="0" anchor="ctr"/>
-          <a:lstStyle/>
-          <a:p>
-            <a:pPr indent="0" marL="0">
-              <a:buNone/>
-            </a:pPr>
-            <a:r>
-              <a:rPr lang="en-US" sz="1150" dirty="0">
+            <a:off x="2194560" y="4846320"/>
+            <a:ext cx="3840480" cy="502920"/>
+          </a:xfrm>
+          <a:prstGeom prst="rect">
+            <a:avLst/>
+          </a:prstGeom>
+          <a:noFill/>
+          <a:ln/>
+        </p:spPr>
+        <p:txBody>
+          <a:bodyPr wrap="square" rtlCol="0" anchor="ctr"/>
+          <a:lstStyle/>
+          <a:p>
+            <a:pPr indent="0" marL="0">
+              <a:buNone/>
+            </a:pPr>
+            <a:r>
+              <a:rPr lang="en-US" sz="1100" dirty="0">
                 <a:solidFill>
                   <a:srgbClr val="444444"/>
                 </a:solidFill>
@@ -6631,7 +6631,7 @@
               </a:rPr>
               <a:t>wrangler.toml [triggers]，每日自動報表</a:t>
             </a:r>
-            <a:endParaRPr lang="en-US" sz="1150" dirty="0"/>
+            <a:endParaRPr lang="en-US" sz="1100" dirty="0"/>
           </a:p>
         </p:txBody>
       </p:sp>
@@ -6643,7 +6643,7 @@
         </p:nvSpPr>
         <p:spPr>
           <a:xfrm>
-            <a:off x="6309360" y="1508760"/>
+            <a:off x="6309360" y="1783080"/>
             <a:ext cx="5486400" cy="365760"/>
           </a:xfrm>
           <a:prstGeom prst="rect">
@@ -6662,13 +6662,13 @@
             <a:r>
               <a:rPr lang="en-US" sz="1600" b="1" dirty="0">
                 <a:solidFill>
-                  <a:srgbClr val="F38020"/>
-                </a:solidFill>
-                <a:latin typeface="微軟正黑體" pitchFamily="34" charset="0"/>
-                <a:ea typeface="微軟正黑體" pitchFamily="34" charset="-122"/>
-                <a:cs typeface="微軟正黑體" pitchFamily="34" charset="-120"/>
-              </a:rPr>
-              <a:t>🏢  樂雲商用方案（PoC 免費 30 天）</a:t>
+                  <a:srgbClr val="8B5CF6"/>
+                </a:solidFill>
+                <a:latin typeface="微軟正黑體" pitchFamily="34" charset="0"/>
+                <a:ea typeface="微軟正黑體" pitchFamily="34" charset="-122"/>
+                <a:cs typeface="微軟正黑體" pitchFamily="34" charset="-120"/>
+              </a:rPr>
+              <a:t>🔬  研究議題（適合論文 / 期末專題）</a:t>
             </a:r>
             <a:endParaRPr lang="en-US" sz="1600" dirty="0"/>
           </a:p>
@@ -6682,444 +6682,502 @@
         </p:nvSpPr>
         <p:spPr>
           <a:xfrm>
-            <a:off x="6309360" y="2011680"/>
-            <a:ext cx="5486400" cy="914400"/>
+            <a:off x="6309360" y="2286000"/>
+            <a:ext cx="91440" cy="502920"/>
+          </a:xfrm>
+          <a:prstGeom prst="rect">
+            <a:avLst/>
+          </a:prstGeom>
+          <a:solidFill>
+            <a:srgbClr val="8B5CF6"/>
+          </a:solidFill>
+          <a:ln/>
+        </p:spPr>
+      </p:sp>
+      <p:sp>
+        <p:nvSpPr>
+          <p:cNvPr id="27" name="Text 24"/>
+          <p:cNvSpPr/>
+          <p:nvPr/>
+        </p:nvSpPr>
+        <p:spPr>
+          <a:xfrm>
+            <a:off x="6537960" y="2286000"/>
+            <a:ext cx="1737360" cy="502920"/>
+          </a:xfrm>
+          <a:prstGeom prst="rect">
+            <a:avLst/>
+          </a:prstGeom>
+          <a:noFill/>
+          <a:ln/>
+        </p:spPr>
+        <p:txBody>
+          <a:bodyPr wrap="square" rtlCol="0" anchor="ctr"/>
+          <a:lstStyle/>
+          <a:p>
+            <a:pPr indent="0" marL="0">
+              <a:buNone/>
+            </a:pPr>
+            <a:r>
+              <a:rPr lang="en-US" sz="1300" b="1" dirty="0">
+                <a:solidFill>
+                  <a:srgbClr val="1A1A1A"/>
+                </a:solidFill>
+                <a:latin typeface="微軟正黑體" pitchFamily="34" charset="0"/>
+                <a:ea typeface="微軟正黑體" pitchFamily="34" charset="-122"/>
+                <a:cs typeface="微軟正黑體" pitchFamily="34" charset="-120"/>
+              </a:rPr>
+              <a:t>LLM Routing</a:t>
+            </a:r>
+            <a:endParaRPr lang="en-US" sz="1300" dirty="0"/>
+          </a:p>
+        </p:txBody>
+      </p:sp>
+      <p:sp>
+        <p:nvSpPr>
+          <p:cNvPr id="28" name="Text 25"/>
+          <p:cNvSpPr/>
+          <p:nvPr/>
+        </p:nvSpPr>
+        <p:spPr>
+          <a:xfrm>
+            <a:off x="8321040" y="2286000"/>
+            <a:ext cx="3474720" cy="502920"/>
+          </a:xfrm>
+          <a:prstGeom prst="rect">
+            <a:avLst/>
+          </a:prstGeom>
+          <a:noFill/>
+          <a:ln/>
+        </p:spPr>
+        <p:txBody>
+          <a:bodyPr wrap="square" rtlCol="0" anchor="ctr"/>
+          <a:lstStyle/>
+          <a:p>
+            <a:pPr indent="0" marL="0">
+              <a:buNone/>
+            </a:pPr>
+            <a:r>
+              <a:rPr lang="en-US" sz="1100" dirty="0">
+                <a:solidFill>
+                  <a:srgbClr val="444444"/>
+                </a:solidFill>
+                <a:latin typeface="微軟正黑體" pitchFamily="34" charset="0"/>
+                <a:ea typeface="微軟正黑體" pitchFamily="34" charset="-122"/>
+                <a:cs typeface="微軟正黑體" pitchFamily="34" charset="-120"/>
+              </a:rPr>
+              <a:t>依語意難度動態分流到不同 model，最佳化成本/品質</a:t>
+            </a:r>
+            <a:endParaRPr lang="en-US" sz="1100" dirty="0"/>
+          </a:p>
+        </p:txBody>
+      </p:sp>
+      <p:sp>
+        <p:nvSpPr>
+          <p:cNvPr id="29" name="Shape 26"/>
+          <p:cNvSpPr/>
+          <p:nvPr/>
+        </p:nvSpPr>
+        <p:spPr>
+          <a:xfrm>
+            <a:off x="6309360" y="2926080"/>
+            <a:ext cx="91440" cy="502920"/>
+          </a:xfrm>
+          <a:prstGeom prst="rect">
+            <a:avLst/>
+          </a:prstGeom>
+          <a:solidFill>
+            <a:srgbClr val="8B5CF6"/>
+          </a:solidFill>
+          <a:ln/>
+        </p:spPr>
+      </p:sp>
+      <p:sp>
+        <p:nvSpPr>
+          <p:cNvPr id="30" name="Text 27"/>
+          <p:cNvSpPr/>
+          <p:nvPr/>
+        </p:nvSpPr>
+        <p:spPr>
+          <a:xfrm>
+            <a:off x="6537960" y="2926080"/>
+            <a:ext cx="1737360" cy="502920"/>
+          </a:xfrm>
+          <a:prstGeom prst="rect">
+            <a:avLst/>
+          </a:prstGeom>
+          <a:noFill/>
+          <a:ln/>
+        </p:spPr>
+        <p:txBody>
+          <a:bodyPr wrap="square" rtlCol="0" anchor="ctr"/>
+          <a:lstStyle/>
+          <a:p>
+            <a:pPr indent="0" marL="0">
+              <a:buNone/>
+            </a:pPr>
+            <a:r>
+              <a:rPr lang="en-US" sz="1300" b="1" dirty="0">
+                <a:solidFill>
+                  <a:srgbClr val="1A1A1A"/>
+                </a:solidFill>
+                <a:latin typeface="微軟正黑體" pitchFamily="34" charset="0"/>
+                <a:ea typeface="微軟正黑體" pitchFamily="34" charset="-122"/>
+                <a:cs typeface="微軟正黑體" pitchFamily="34" charset="-120"/>
+              </a:rPr>
+              <a:t>Cost-aware Caching</a:t>
+            </a:r>
+            <a:endParaRPr lang="en-US" sz="1300" dirty="0"/>
+          </a:p>
+        </p:txBody>
+      </p:sp>
+      <p:sp>
+        <p:nvSpPr>
+          <p:cNvPr id="31" name="Text 28"/>
+          <p:cNvSpPr/>
+          <p:nvPr/>
+        </p:nvSpPr>
+        <p:spPr>
+          <a:xfrm>
+            <a:off x="8321040" y="2926080"/>
+            <a:ext cx="3474720" cy="502920"/>
+          </a:xfrm>
+          <a:prstGeom prst="rect">
+            <a:avLst/>
+          </a:prstGeom>
+          <a:noFill/>
+          <a:ln/>
+        </p:spPr>
+        <p:txBody>
+          <a:bodyPr wrap="square" rtlCol="0" anchor="ctr"/>
+          <a:lstStyle/>
+          <a:p>
+            <a:pPr indent="0" marL="0">
+              <a:buNone/>
+            </a:pPr>
+            <a:r>
+              <a:rPr lang="en-US" sz="1100" dirty="0">
+                <a:solidFill>
+                  <a:srgbClr val="444444"/>
+                </a:solidFill>
+                <a:latin typeface="微軟正黑體" pitchFamily="34" charset="0"/>
+                <a:ea typeface="微軟正黑體" pitchFamily="34" charset="-122"/>
+                <a:cs typeface="微軟正黑體" pitchFamily="34" charset="-120"/>
+              </a:rPr>
+              <a:t>語義 cache：近義 prompt 命中策略與失效機制</a:t>
+            </a:r>
+            <a:endParaRPr lang="en-US" sz="1100" dirty="0"/>
+          </a:p>
+        </p:txBody>
+      </p:sp>
+      <p:sp>
+        <p:nvSpPr>
+          <p:cNvPr id="32" name="Shape 29"/>
+          <p:cNvSpPr/>
+          <p:nvPr/>
+        </p:nvSpPr>
+        <p:spPr>
+          <a:xfrm>
+            <a:off x="6309360" y="3566160"/>
+            <a:ext cx="91440" cy="502920"/>
+          </a:xfrm>
+          <a:prstGeom prst="rect">
+            <a:avLst/>
+          </a:prstGeom>
+          <a:solidFill>
+            <a:srgbClr val="8B5CF6"/>
+          </a:solidFill>
+          <a:ln/>
+        </p:spPr>
+      </p:sp>
+      <p:sp>
+        <p:nvSpPr>
+          <p:cNvPr id="33" name="Text 30"/>
+          <p:cNvSpPr/>
+          <p:nvPr/>
+        </p:nvSpPr>
+        <p:spPr>
+          <a:xfrm>
+            <a:off x="6537960" y="3566160"/>
+            <a:ext cx="1737360" cy="502920"/>
+          </a:xfrm>
+          <a:prstGeom prst="rect">
+            <a:avLst/>
+          </a:prstGeom>
+          <a:noFill/>
+          <a:ln/>
+        </p:spPr>
+        <p:txBody>
+          <a:bodyPr wrap="square" rtlCol="0" anchor="ctr"/>
+          <a:lstStyle/>
+          <a:p>
+            <a:pPr indent="0" marL="0">
+              <a:buNone/>
+            </a:pPr>
+            <a:r>
+              <a:rPr lang="en-US" sz="1300" b="1" dirty="0">
+                <a:solidFill>
+                  <a:srgbClr val="1A1A1A"/>
+                </a:solidFill>
+                <a:latin typeface="微軟正黑體" pitchFamily="34" charset="0"/>
+                <a:ea typeface="微軟正黑體" pitchFamily="34" charset="-122"/>
+                <a:cs typeface="微軟正黑體" pitchFamily="34" charset="-120"/>
+              </a:rPr>
+              <a:t>Guardrail Evaluation</a:t>
+            </a:r>
+            <a:endParaRPr lang="en-US" sz="1300" dirty="0"/>
+          </a:p>
+        </p:txBody>
+      </p:sp>
+      <p:sp>
+        <p:nvSpPr>
+          <p:cNvPr id="34" name="Text 31"/>
+          <p:cNvSpPr/>
+          <p:nvPr/>
+        </p:nvSpPr>
+        <p:spPr>
+          <a:xfrm>
+            <a:off x="8321040" y="3566160"/>
+            <a:ext cx="3474720" cy="502920"/>
+          </a:xfrm>
+          <a:prstGeom prst="rect">
+            <a:avLst/>
+          </a:prstGeom>
+          <a:noFill/>
+          <a:ln/>
+        </p:spPr>
+        <p:txBody>
+          <a:bodyPr wrap="square" rtlCol="0" anchor="ctr"/>
+          <a:lstStyle/>
+          <a:p>
+            <a:pPr indent="0" marL="0">
+              <a:buNone/>
+            </a:pPr>
+            <a:r>
+              <a:rPr lang="en-US" sz="1100" dirty="0">
+                <a:solidFill>
+                  <a:srgbClr val="444444"/>
+                </a:solidFill>
+                <a:latin typeface="微軟正黑體" pitchFamily="34" charset="0"/>
+                <a:ea typeface="微軟正黑體" pitchFamily="34" charset="-122"/>
+                <a:cs typeface="微軟正黑體" pitchFamily="34" charset="-120"/>
+              </a:rPr>
+              <a:t>PII 偵測 FP/FN 評估、prompt injection benchmarking</a:t>
+            </a:r>
+            <a:endParaRPr lang="en-US" sz="1100" dirty="0"/>
+          </a:p>
+        </p:txBody>
+      </p:sp>
+      <p:sp>
+        <p:nvSpPr>
+          <p:cNvPr id="35" name="Shape 32"/>
+          <p:cNvSpPr/>
+          <p:nvPr/>
+        </p:nvSpPr>
+        <p:spPr>
+          <a:xfrm>
+            <a:off x="6309360" y="4206240"/>
+            <a:ext cx="91440" cy="502920"/>
+          </a:xfrm>
+          <a:prstGeom prst="rect">
+            <a:avLst/>
+          </a:prstGeom>
+          <a:solidFill>
+            <a:srgbClr val="8B5CF6"/>
+          </a:solidFill>
+          <a:ln/>
+        </p:spPr>
+      </p:sp>
+      <p:sp>
+        <p:nvSpPr>
+          <p:cNvPr id="36" name="Text 33"/>
+          <p:cNvSpPr/>
+          <p:nvPr/>
+        </p:nvSpPr>
+        <p:spPr>
+          <a:xfrm>
+            <a:off x="6537960" y="4206240"/>
+            <a:ext cx="1737360" cy="502920"/>
+          </a:xfrm>
+          <a:prstGeom prst="rect">
+            <a:avLst/>
+          </a:prstGeom>
+          <a:noFill/>
+          <a:ln/>
+        </p:spPr>
+        <p:txBody>
+          <a:bodyPr wrap="square" rtlCol="0" anchor="ctr"/>
+          <a:lstStyle/>
+          <a:p>
+            <a:pPr indent="0" marL="0">
+              <a:buNone/>
+            </a:pPr>
+            <a:r>
+              <a:rPr lang="en-US" sz="1300" b="1" dirty="0">
+                <a:solidFill>
+                  <a:srgbClr val="1A1A1A"/>
+                </a:solidFill>
+                <a:latin typeface="微軟正黑體" pitchFamily="34" charset="0"/>
+                <a:ea typeface="微軟正黑體" pitchFamily="34" charset="-122"/>
+                <a:cs typeface="微軟正黑體" pitchFamily="34" charset="-120"/>
+              </a:rPr>
+              <a:t>Agentic Safety</a:t>
+            </a:r>
+            <a:endParaRPr lang="en-US" sz="1300" dirty="0"/>
+          </a:p>
+        </p:txBody>
+      </p:sp>
+      <p:sp>
+        <p:nvSpPr>
+          <p:cNvPr id="37" name="Text 34"/>
+          <p:cNvSpPr/>
+          <p:nvPr/>
+        </p:nvSpPr>
+        <p:spPr>
+          <a:xfrm>
+            <a:off x="8321040" y="4206240"/>
+            <a:ext cx="3474720" cy="502920"/>
+          </a:xfrm>
+          <a:prstGeom prst="rect">
+            <a:avLst/>
+          </a:prstGeom>
+          <a:noFill/>
+          <a:ln/>
+        </p:spPr>
+        <p:txBody>
+          <a:bodyPr wrap="square" rtlCol="0" anchor="ctr"/>
+          <a:lstStyle/>
+          <a:p>
+            <a:pPr indent="0" marL="0">
+              <a:buNone/>
+            </a:pPr>
+            <a:r>
+              <a:rPr lang="en-US" sz="1100" dirty="0">
+                <a:solidFill>
+                  <a:srgbClr val="444444"/>
+                </a:solidFill>
+                <a:latin typeface="微軟正黑體" pitchFamily="34" charset="0"/>
+                <a:ea typeface="微軟正黑體" pitchFamily="34" charset="-122"/>
+                <a:cs typeface="微軟正黑體" pitchFamily="34" charset="-120"/>
+              </a:rPr>
+              <a:t>MCP tool injection 攻防、agent loop 終止條件分析</a:t>
+            </a:r>
+            <a:endParaRPr lang="en-US" sz="1100" dirty="0"/>
+          </a:p>
+        </p:txBody>
+      </p:sp>
+      <p:sp>
+        <p:nvSpPr>
+          <p:cNvPr id="38" name="Shape 35"/>
+          <p:cNvSpPr/>
+          <p:nvPr/>
+        </p:nvSpPr>
+        <p:spPr>
+          <a:xfrm>
+            <a:off x="6309360" y="4846320"/>
+            <a:ext cx="91440" cy="502920"/>
+          </a:xfrm>
+          <a:prstGeom prst="rect">
+            <a:avLst/>
+          </a:prstGeom>
+          <a:solidFill>
+            <a:srgbClr val="8B5CF6"/>
+          </a:solidFill>
+          <a:ln/>
+        </p:spPr>
+      </p:sp>
+      <p:sp>
+        <p:nvSpPr>
+          <p:cNvPr id="39" name="Text 36"/>
+          <p:cNvSpPr/>
+          <p:nvPr/>
+        </p:nvSpPr>
+        <p:spPr>
+          <a:xfrm>
+            <a:off x="6537960" y="4846320"/>
+            <a:ext cx="1737360" cy="502920"/>
+          </a:xfrm>
+          <a:prstGeom prst="rect">
+            <a:avLst/>
+          </a:prstGeom>
+          <a:noFill/>
+          <a:ln/>
+        </p:spPr>
+        <p:txBody>
+          <a:bodyPr wrap="square" rtlCol="0" anchor="ctr"/>
+          <a:lstStyle/>
+          <a:p>
+            <a:pPr indent="0" marL="0">
+              <a:buNone/>
+            </a:pPr>
+            <a:r>
+              <a:rPr lang="en-US" sz="1300" b="1" dirty="0">
+                <a:solidFill>
+                  <a:srgbClr val="1A1A1A"/>
+                </a:solidFill>
+                <a:latin typeface="微軟正黑體" pitchFamily="34" charset="0"/>
+                <a:ea typeface="微軟正黑體" pitchFamily="34" charset="-122"/>
+                <a:cs typeface="微軟正黑體" pitchFamily="34" charset="-120"/>
+              </a:rPr>
+              <a:t>Edge AI Policy</a:t>
+            </a:r>
+            <a:endParaRPr lang="en-US" sz="1300" dirty="0"/>
+          </a:p>
+        </p:txBody>
+      </p:sp>
+      <p:sp>
+        <p:nvSpPr>
+          <p:cNvPr id="40" name="Text 37"/>
+          <p:cNvSpPr/>
+          <p:nvPr/>
+        </p:nvSpPr>
+        <p:spPr>
+          <a:xfrm>
+            <a:off x="8321040" y="4846320"/>
+            <a:ext cx="3474720" cy="502920"/>
+          </a:xfrm>
+          <a:prstGeom prst="rect">
+            <a:avLst/>
+          </a:prstGeom>
+          <a:noFill/>
+          <a:ln/>
+        </p:spPr>
+        <p:txBody>
+          <a:bodyPr wrap="square" rtlCol="0" anchor="ctr"/>
+          <a:lstStyle/>
+          <a:p>
+            <a:pPr indent="0" marL="0">
+              <a:buNone/>
+            </a:pPr>
+            <a:r>
+              <a:rPr lang="en-US" sz="1100" dirty="0">
+                <a:solidFill>
+                  <a:srgbClr val="444444"/>
+                </a:solidFill>
+                <a:latin typeface="微軟正黑體" pitchFamily="34" charset="0"/>
+                <a:ea typeface="微軟正黑體" pitchFamily="34" charset="-122"/>
+                <a:cs typeface="微軟正黑體" pitchFamily="34" charset="-120"/>
+              </a:rPr>
+              <a:t>邊緣節點上的分散式 policy enforcement 與一致性</a:t>
+            </a:r>
+            <a:endParaRPr lang="en-US" sz="1100" dirty="0"/>
+          </a:p>
+        </p:txBody>
+      </p:sp>
+      <p:sp>
+        <p:nvSpPr>
+          <p:cNvPr id="41" name="Shape 38"/>
+          <p:cNvSpPr/>
+          <p:nvPr/>
+        </p:nvSpPr>
+        <p:spPr>
+          <a:xfrm>
+            <a:off x="457200" y="5989320"/>
+            <a:ext cx="11274552" cy="347472"/>
           </a:xfrm>
           <a:prstGeom prst="roundRect">
             <a:avLst>
-              <a:gd name="adj" fmla="val 8000"/>
-            </a:avLst>
-          </a:prstGeom>
-          <a:solidFill>
-            <a:srgbClr val="FAFBFC"/>
-          </a:solidFill>
-          <a:ln w="19050">
-            <a:solidFill>
-              <a:srgbClr val="10B981"/>
-            </a:solidFill>
-            <a:prstDash val="solid"/>
-          </a:ln>
-        </p:spPr>
-      </p:sp>
-      <p:sp>
-        <p:nvSpPr>
-          <p:cNvPr id="27" name="Text 24"/>
-          <p:cNvSpPr/>
-          <p:nvPr/>
-        </p:nvSpPr>
-        <p:spPr>
-          <a:xfrm>
-            <a:off x="6446520" y="2103120"/>
-            <a:ext cx="1371600" cy="320040"/>
-          </a:xfrm>
-          <a:prstGeom prst="rect">
-            <a:avLst/>
-          </a:prstGeom>
-          <a:noFill/>
-          <a:ln/>
-        </p:spPr>
-        <p:txBody>
-          <a:bodyPr wrap="square" rtlCol="0" anchor="ctr"/>
-          <a:lstStyle/>
-          <a:p>
-            <a:pPr indent="0" marL="0">
-              <a:buNone/>
-            </a:pPr>
-            <a:r>
-              <a:rPr lang="en-US" sz="1400" b="1" dirty="0">
-                <a:solidFill>
-                  <a:srgbClr val="10B981"/>
-                </a:solidFill>
-                <a:latin typeface="Calibri" pitchFamily="34" charset="0"/>
-                <a:ea typeface="Calibri" pitchFamily="34" charset="-122"/>
-                <a:cs typeface="Calibri" pitchFamily="34" charset="-120"/>
-              </a:rPr>
-              <a:t>Basic</a:t>
-            </a:r>
-            <a:endParaRPr lang="en-US" sz="1400" dirty="0"/>
-          </a:p>
-        </p:txBody>
-      </p:sp>
-      <p:sp>
-        <p:nvSpPr>
-          <p:cNvPr id="28" name="Text 25"/>
-          <p:cNvSpPr/>
-          <p:nvPr/>
-        </p:nvSpPr>
-        <p:spPr>
-          <a:xfrm>
-            <a:off x="6446520" y="2423160"/>
-            <a:ext cx="4114800" cy="457200"/>
-          </a:xfrm>
-          <a:prstGeom prst="rect">
-            <a:avLst/>
-          </a:prstGeom>
-          <a:noFill/>
-          <a:ln/>
-        </p:spPr>
-        <p:txBody>
-          <a:bodyPr wrap="square" rtlCol="0" anchor="ctr"/>
-          <a:lstStyle/>
-          <a:p>
-            <a:pPr indent="0" marL="0">
-              <a:buNone/>
-            </a:pPr>
-            <a:r>
-              <a:rPr lang="en-US" sz="1100" dirty="0">
-                <a:solidFill>
-                  <a:srgbClr val="444444"/>
-                </a:solidFill>
-                <a:latin typeface="微軟正黑體" pitchFamily="34" charset="0"/>
-                <a:ea typeface="微軟正黑體" pitchFamily="34" charset="-122"/>
-                <a:cs typeface="微軟正黑體" pitchFamily="34" charset="-120"/>
-              </a:rPr>
-              <a:t>單部門 PoC + 基礎儀表板</a:t>
-            </a:r>
-            <a:endParaRPr lang="en-US" sz="1100" dirty="0"/>
-          </a:p>
-        </p:txBody>
-      </p:sp>
-      <p:sp>
-        <p:nvSpPr>
-          <p:cNvPr id="29" name="Text 26"/>
-          <p:cNvSpPr/>
-          <p:nvPr/>
-        </p:nvSpPr>
-        <p:spPr>
-          <a:xfrm>
-            <a:off x="10058400" y="2240280"/>
-            <a:ext cx="1691640" cy="457200"/>
-          </a:xfrm>
-          <a:prstGeom prst="rect">
-            <a:avLst/>
-          </a:prstGeom>
-          <a:noFill/>
-          <a:ln/>
-        </p:spPr>
-        <p:txBody>
-          <a:bodyPr wrap="square" rtlCol="0" anchor="ctr"/>
-          <a:lstStyle/>
-          <a:p>
-            <a:pPr algn="r" indent="0" marL="0">
-              <a:buNone/>
-            </a:pPr>
-            <a:r>
-              <a:rPr lang="en-US" sz="1200" b="1" dirty="0">
-                <a:solidFill>
-                  <a:srgbClr val="10B981"/>
-                </a:solidFill>
-                <a:latin typeface="微軟正黑體" pitchFamily="34" charset="0"/>
-                <a:ea typeface="微軟正黑體" pitchFamily="34" charset="-122"/>
-                <a:cs typeface="微軟正黑體" pitchFamily="34" charset="-120"/>
-              </a:rPr>
-              <a:t>NT$80-150萬/年</a:t>
-            </a:r>
-            <a:endParaRPr lang="en-US" sz="1200" dirty="0"/>
-          </a:p>
-        </p:txBody>
-      </p:sp>
-      <p:sp>
-        <p:nvSpPr>
-          <p:cNvPr id="30" name="Shape 27"/>
-          <p:cNvSpPr/>
-          <p:nvPr/>
-        </p:nvSpPr>
-        <p:spPr>
-          <a:xfrm>
-            <a:off x="6309360" y="3063240"/>
-            <a:ext cx="5486400" cy="914400"/>
-          </a:xfrm>
-          <a:prstGeom prst="roundRect">
-            <a:avLst>
-              <a:gd name="adj" fmla="val 8000"/>
-            </a:avLst>
-          </a:prstGeom>
-          <a:solidFill>
-            <a:srgbClr val="FAFBFC"/>
-          </a:solidFill>
-          <a:ln w="19050">
-            <a:solidFill>
-              <a:srgbClr val="F38020"/>
-            </a:solidFill>
-            <a:prstDash val="solid"/>
-          </a:ln>
-        </p:spPr>
-      </p:sp>
-      <p:sp>
-        <p:nvSpPr>
-          <p:cNvPr id="31" name="Text 28"/>
-          <p:cNvSpPr/>
-          <p:nvPr/>
-        </p:nvSpPr>
-        <p:spPr>
-          <a:xfrm>
-            <a:off x="6446520" y="3154680"/>
-            <a:ext cx="1371600" cy="320040"/>
-          </a:xfrm>
-          <a:prstGeom prst="rect">
-            <a:avLst/>
-          </a:prstGeom>
-          <a:noFill/>
-          <a:ln/>
-        </p:spPr>
-        <p:txBody>
-          <a:bodyPr wrap="square" rtlCol="0" anchor="ctr"/>
-          <a:lstStyle/>
-          <a:p>
-            <a:pPr indent="0" marL="0">
-              <a:buNone/>
-            </a:pPr>
-            <a:r>
-              <a:rPr lang="en-US" sz="1400" b="1" dirty="0">
-                <a:solidFill>
-                  <a:srgbClr val="F38020"/>
-                </a:solidFill>
-                <a:latin typeface="Calibri" pitchFamily="34" charset="0"/>
-                <a:ea typeface="Calibri" pitchFamily="34" charset="-122"/>
-                <a:cs typeface="Calibri" pitchFamily="34" charset="-120"/>
-              </a:rPr>
-              <a:t>Advanced</a:t>
-            </a:r>
-            <a:endParaRPr lang="en-US" sz="1400" dirty="0"/>
-          </a:p>
-        </p:txBody>
-      </p:sp>
-      <p:sp>
-        <p:nvSpPr>
-          <p:cNvPr id="32" name="Text 29"/>
-          <p:cNvSpPr/>
-          <p:nvPr/>
-        </p:nvSpPr>
-        <p:spPr>
-          <a:xfrm>
-            <a:off x="6446520" y="3474720"/>
-            <a:ext cx="4114800" cy="457200"/>
-          </a:xfrm>
-          <a:prstGeom prst="rect">
-            <a:avLst/>
-          </a:prstGeom>
-          <a:noFill/>
-          <a:ln/>
-        </p:spPr>
-        <p:txBody>
-          <a:bodyPr wrap="square" rtlCol="0" anchor="ctr"/>
-          <a:lstStyle/>
-          <a:p>
-            <a:pPr indent="0" marL="0">
-              <a:buNone/>
-            </a:pPr>
-            <a:r>
-              <a:rPr lang="en-US" sz="1100" dirty="0">
-                <a:solidFill>
-                  <a:srgbClr val="444444"/>
-                </a:solidFill>
-                <a:latin typeface="微軟正黑體" pitchFamily="34" charset="0"/>
-                <a:ea typeface="微軟正黑體" pitchFamily="34" charset="-122"/>
-                <a:cs typeface="微軟正黑體" pitchFamily="34" charset="-120"/>
-              </a:rPr>
-              <a:t>多部門 Policy + 完整 Guardrails</a:t>
-            </a:r>
-            <a:endParaRPr lang="en-US" sz="1100" dirty="0"/>
-          </a:p>
-        </p:txBody>
-      </p:sp>
-      <p:sp>
-        <p:nvSpPr>
-          <p:cNvPr id="33" name="Text 30"/>
-          <p:cNvSpPr/>
-          <p:nvPr/>
-        </p:nvSpPr>
-        <p:spPr>
-          <a:xfrm>
-            <a:off x="10058400" y="3291840"/>
-            <a:ext cx="1691640" cy="457200"/>
-          </a:xfrm>
-          <a:prstGeom prst="rect">
-            <a:avLst/>
-          </a:prstGeom>
-          <a:noFill/>
-          <a:ln/>
-        </p:spPr>
-        <p:txBody>
-          <a:bodyPr wrap="square" rtlCol="0" anchor="ctr"/>
-          <a:lstStyle/>
-          <a:p>
-            <a:pPr algn="r" indent="0" marL="0">
-              <a:buNone/>
-            </a:pPr>
-            <a:r>
-              <a:rPr lang="en-US" sz="1200" b="1" dirty="0">
-                <a:solidFill>
-                  <a:srgbClr val="F38020"/>
-                </a:solidFill>
-                <a:latin typeface="微軟正黑體" pitchFamily="34" charset="0"/>
-                <a:ea typeface="微軟正黑體" pitchFamily="34" charset="-122"/>
-                <a:cs typeface="微軟正黑體" pitchFamily="34" charset="-120"/>
-              </a:rPr>
-              <a:t>NT$400-600萬/年</a:t>
-            </a:r>
-            <a:endParaRPr lang="en-US" sz="1200" dirty="0"/>
-          </a:p>
-        </p:txBody>
-      </p:sp>
-      <p:sp>
-        <p:nvSpPr>
-          <p:cNvPr id="34" name="Shape 31"/>
-          <p:cNvSpPr/>
-          <p:nvPr/>
-        </p:nvSpPr>
-        <p:spPr>
-          <a:xfrm>
-            <a:off x="6309360" y="4114800"/>
-            <a:ext cx="5486400" cy="914400"/>
-          </a:xfrm>
-          <a:prstGeom prst="roundRect">
-            <a:avLst>
-              <a:gd name="adj" fmla="val 8000"/>
-            </a:avLst>
-          </a:prstGeom>
-          <a:solidFill>
-            <a:srgbClr val="FAFBFC"/>
-          </a:solidFill>
-          <a:ln w="19050">
-            <a:solidFill>
-              <a:srgbClr val="8B5CF6"/>
-            </a:solidFill>
-            <a:prstDash val="solid"/>
-          </a:ln>
-        </p:spPr>
-      </p:sp>
-      <p:sp>
-        <p:nvSpPr>
-          <p:cNvPr id="35" name="Text 32"/>
-          <p:cNvSpPr/>
-          <p:nvPr/>
-        </p:nvSpPr>
-        <p:spPr>
-          <a:xfrm>
-            <a:off x="6446520" y="4206240"/>
-            <a:ext cx="1371600" cy="320040"/>
-          </a:xfrm>
-          <a:prstGeom prst="rect">
-            <a:avLst/>
-          </a:prstGeom>
-          <a:noFill/>
-          <a:ln/>
-        </p:spPr>
-        <p:txBody>
-          <a:bodyPr wrap="square" rtlCol="0" anchor="ctr"/>
-          <a:lstStyle/>
-          <a:p>
-            <a:pPr indent="0" marL="0">
-              <a:buNone/>
-            </a:pPr>
-            <a:r>
-              <a:rPr lang="en-US" sz="1400" b="1" dirty="0">
-                <a:solidFill>
-                  <a:srgbClr val="8B5CF6"/>
-                </a:solidFill>
-                <a:latin typeface="Calibri" pitchFamily="34" charset="0"/>
-                <a:ea typeface="Calibri" pitchFamily="34" charset="-122"/>
-                <a:cs typeface="Calibri" pitchFamily="34" charset="-120"/>
-              </a:rPr>
-              <a:t>Premium</a:t>
-            </a:r>
-            <a:endParaRPr lang="en-US" sz="1400" dirty="0"/>
-          </a:p>
-        </p:txBody>
-      </p:sp>
-      <p:sp>
-        <p:nvSpPr>
-          <p:cNvPr id="36" name="Text 33"/>
-          <p:cNvSpPr/>
-          <p:nvPr/>
-        </p:nvSpPr>
-        <p:spPr>
-          <a:xfrm>
-            <a:off x="6446520" y="4526280"/>
-            <a:ext cx="4114800" cy="457200"/>
-          </a:xfrm>
-          <a:prstGeom prst="rect">
-            <a:avLst/>
-          </a:prstGeom>
-          <a:noFill/>
-          <a:ln/>
-        </p:spPr>
-        <p:txBody>
-          <a:bodyPr wrap="square" rtlCol="0" anchor="ctr"/>
-          <a:lstStyle/>
-          <a:p>
-            <a:pPr indent="0" marL="0">
-              <a:buNone/>
-            </a:pPr>
-            <a:r>
-              <a:rPr lang="en-US" sz="1100" dirty="0">
-                <a:solidFill>
-                  <a:srgbClr val="444444"/>
-                </a:solidFill>
-                <a:latin typeface="微軟正黑體" pitchFamily="34" charset="0"/>
-                <a:ea typeface="微軟正黑體" pitchFamily="34" charset="-122"/>
-                <a:cs typeface="微軟正黑體" pitchFamily="34" charset="-120"/>
-              </a:rPr>
-              <a:t>全企業整合 + 24/7 SOC + TAM</a:t>
-            </a:r>
-            <a:endParaRPr lang="en-US" sz="1100" dirty="0"/>
-          </a:p>
-        </p:txBody>
-      </p:sp>
-      <p:sp>
-        <p:nvSpPr>
-          <p:cNvPr id="37" name="Text 34"/>
-          <p:cNvSpPr/>
-          <p:nvPr/>
-        </p:nvSpPr>
-        <p:spPr>
-          <a:xfrm>
-            <a:off x="10058400" y="4343400"/>
-            <a:ext cx="1691640" cy="457200"/>
-          </a:xfrm>
-          <a:prstGeom prst="rect">
-            <a:avLst/>
-          </a:prstGeom>
-          <a:noFill/>
-          <a:ln/>
-        </p:spPr>
-        <p:txBody>
-          <a:bodyPr wrap="square" rtlCol="0" anchor="ctr"/>
-          <a:lstStyle/>
-          <a:p>
-            <a:pPr algn="r" indent="0" marL="0">
-              <a:buNone/>
-            </a:pPr>
-            <a:r>
-              <a:rPr lang="en-US" sz="1200" b="1" dirty="0">
-                <a:solidFill>
-                  <a:srgbClr val="8B5CF6"/>
-                </a:solidFill>
-                <a:latin typeface="微軟正黑體" pitchFamily="34" charset="0"/>
-                <a:ea typeface="微軟正黑體" pitchFamily="34" charset="-122"/>
-                <a:cs typeface="微軟正黑體" pitchFamily="34" charset="-120"/>
-              </a:rPr>
-              <a:t>NT$800-1,200萬/年</a:t>
-            </a:r>
-            <a:endParaRPr lang="en-US" sz="1200" dirty="0"/>
-          </a:p>
-        </p:txBody>
-      </p:sp>
-      <p:sp>
-        <p:nvSpPr>
-          <p:cNvPr id="38" name="Shape 35"/>
-          <p:cNvSpPr/>
-          <p:nvPr/>
-        </p:nvSpPr>
-        <p:spPr>
-          <a:xfrm>
-            <a:off x="457200" y="5989320"/>
-            <a:ext cx="11274552" cy="365760"/>
-          </a:xfrm>
-          <a:prstGeom prst="roundRect">
-            <a:avLst>
-              <a:gd name="adj" fmla="val 15000"/>
+              <a:gd name="adj" fmla="val 15789"/>
             </a:avLst>
           </a:prstGeom>
           <a:solidFill>
@@ -7130,14 +7188,14 @@
       </p:sp>
       <p:sp>
         <p:nvSpPr>
-          <p:cNvPr id="39" name="Shape 36"/>
+          <p:cNvPr id="42" name="Shape 39"/>
           <p:cNvSpPr/>
           <p:nvPr/>
         </p:nvSpPr>
         <p:spPr>
           <a:xfrm>
             <a:off x="457200" y="5989320"/>
-            <a:ext cx="54864" cy="365760"/>
+            <a:ext cx="54864" cy="347472"/>
           </a:xfrm>
           <a:prstGeom prst="rect">
             <a:avLst/>
@@ -7150,14 +7208,14 @@
       </p:sp>
       <p:sp>
         <p:nvSpPr>
-          <p:cNvPr id="40" name="Text 37"/>
+          <p:cNvPr id="43" name="Text 40"/>
           <p:cNvSpPr/>
           <p:nvPr/>
         </p:nvSpPr>
         <p:spPr>
           <a:xfrm>
             <a:off x="640080" y="5989320"/>
-            <a:ext cx="11000232" cy="365760"/>
+            <a:ext cx="11000232" cy="347472"/>
           </a:xfrm>
           <a:prstGeom prst="rect">
             <a:avLst/>
@@ -7181,7 +7239,7 @@
                 <a:ea typeface="微軟正黑體" pitchFamily="34" charset="-122"/>
                 <a:cs typeface="微軟正黑體" pitchFamily="34" charset="-120"/>
               </a:rPr>
-              <a:t>聯絡：service@leyun.cloud · +886-2-77220055 · www.leyun.cloud · 講師 victor@leyun.cloud</a:t>
+              <a:t>若以本 repo 為基礎做研究專題，歡迎來信討論：victor@leyun.cloud · 樂雲可提供技術討論窗口與 Cloudflare 帳號額度建議。</a:t>
             </a:r>
             <a:endParaRPr lang="en-US" sz="1100" dirty="0"/>
           </a:p>
@@ -7776,7 +7834,7 @@
                 <a:ea typeface="微軟正黑體" pitchFamily="34" charset="-122"/>
                 <a:cs typeface="微軟正黑體" pitchFamily="34" charset="-120"/>
               </a:rPr>
-              <a:t>NEXT STEP — 課後問題請來信或加入樂雲學員交流社群</a:t>
+              <a:t>NEXT STEP — Repo 持續開放，歡迎 issue / PR / 研究議題討論</a:t>
             </a:r>
             <a:endParaRPr lang="en-US" sz="1400" dirty="0"/>
           </a:p>
@@ -7815,7 +7873,7 @@
                 <a:ea typeface="微軟正黑體" pitchFamily="34" charset="-122"/>
                 <a:cs typeface="微軟正黑體" pitchFamily="34" charset="-120"/>
               </a:rPr>
-              <a:t>提供 Basic / Advanced / Premium 三層商用方案，PoC 30 天免費試用</a:t>
+              <a:t>github.com/victor80122/cloudflare-aigw-course · MIT License · 任意衍生</a:t>
             </a:r>
             <a:endParaRPr lang="en-US" sz="1200" dirty="0"/>
           </a:p>
@@ -7954,7 +8012,7 @@
               <a:buNone/>
             </a:pPr>
             <a:r>
-              <a:rPr lang="en-US" sz="2600" b="1" dirty="0">
+              <a:rPr lang="en-US" sz="2400" b="1" dirty="0">
                 <a:solidFill>
                   <a:srgbClr val="F38020"/>
                 </a:solidFill>
@@ -7968,7 +8026,7 @@
               <a:buNone/>
             </a:pPr>
             <a:r>
-              <a:rPr lang="en-US" sz="2600" b="1" dirty="0">
+              <a:rPr lang="en-US" sz="2400" b="1" dirty="0">
                 <a:solidFill>
                   <a:srgbClr val="B0B0B0"/>
                 </a:solidFill>
@@ -7982,7 +8040,7 @@
               <a:buNone/>
             </a:pPr>
             <a:r>
-              <a:rPr lang="en-US" sz="2600" b="1" dirty="0">
+              <a:rPr lang="en-US" sz="2400" b="1" dirty="0">
                 <a:solidFill>
                   <a:srgbClr val="1A1A1A"/>
                 </a:solidFill>
@@ -7992,7 +8050,7 @@
               </a:rPr>
               <a:t>提案大綱</a:t>
             </a:r>
-            <a:endParaRPr lang="en-US" sz="2600" dirty="0"/>
+            <a:endParaRPr lang="en-US" sz="2400" dirty="0"/>
           </a:p>
         </p:txBody>
       </p:sp>
@@ -8004,8 +8062,8 @@
         </p:nvSpPr>
         <p:spPr>
           <a:xfrm>
-            <a:off x="457200" y="886968"/>
-            <a:ext cx="2286000" cy="137160"/>
+            <a:off x="457200" y="1042416"/>
+            <a:ext cx="2286000" cy="109728"/>
           </a:xfrm>
           <a:prstGeom prst="rect">
             <a:avLst/>
@@ -8935,7 +8993,7 @@
                 <a:ea typeface="微軟正黑體" pitchFamily="34" charset="-122"/>
                 <a:cs typeface="微軟正黑體" pitchFamily="34" charset="-120"/>
               </a:rPr>
-              <a:t>15 min — 延伸自學地圖 + 樂雲商用方案</a:t>
+              <a:t>15 min — 自學地圖 + 研究議題探索</a:t>
             </a:r>
             <a:endParaRPr lang="en-US" sz="1100" dirty="0"/>
           </a:p>
@@ -9074,7 +9132,7 @@
               <a:buNone/>
             </a:pPr>
             <a:r>
-              <a:rPr lang="en-US" sz="2600" b="1" dirty="0">
+              <a:rPr lang="en-US" sz="2000" b="1" dirty="0">
                 <a:solidFill>
                   <a:srgbClr val="F38020"/>
                 </a:solidFill>
@@ -9088,7 +9146,7 @@
               <a:buNone/>
             </a:pPr>
             <a:r>
-              <a:rPr lang="en-US" sz="2600" b="1" dirty="0">
+              <a:rPr lang="en-US" sz="2000" b="1" dirty="0">
                 <a:solidFill>
                   <a:srgbClr val="B0B0B0"/>
                 </a:solidFill>
@@ -9102,7 +9160,7 @@
               <a:buNone/>
             </a:pPr>
             <a:r>
-              <a:rPr lang="en-US" sz="2600" b="1" dirty="0">
+              <a:rPr lang="en-US" sz="2000" b="1" dirty="0">
                 <a:solidFill>
                   <a:srgbClr val="1A1A1A"/>
                 </a:solidFill>
@@ -9112,7 +9170,7 @@
               </a:rPr>
               <a:t>為什麼需要 AI Gateway：企業 AI 三大痛點</a:t>
             </a:r>
-            <a:endParaRPr lang="en-US" sz="2600" dirty="0"/>
+            <a:endParaRPr lang="en-US" sz="2000" dirty="0"/>
           </a:p>
         </p:txBody>
       </p:sp>
@@ -9124,8 +9182,8 @@
         </p:nvSpPr>
         <p:spPr>
           <a:xfrm>
-            <a:off x="457200" y="886968"/>
-            <a:ext cx="6364224" cy="137160"/>
+            <a:off x="457200" y="1042416"/>
+            <a:ext cx="5614416" cy="109728"/>
           </a:xfrm>
           <a:prstGeom prst="rect">
             <a:avLst/>
@@ -9146,8 +9204,8 @@
         </p:nvSpPr>
         <p:spPr>
           <a:xfrm>
-            <a:off x="457200" y="1097280"/>
-            <a:ext cx="8686800" cy="320040"/>
+            <a:off x="457200" y="1225296"/>
+            <a:ext cx="8686800" cy="292608"/>
           </a:xfrm>
           <a:prstGeom prst="rect">
             <a:avLst/>
@@ -9224,12 +9282,12 @@
         </p:nvSpPr>
         <p:spPr>
           <a:xfrm>
-            <a:off x="457200" y="1572768"/>
-            <a:ext cx="11274552" cy="1600200"/>
+            <a:off x="457200" y="1645920"/>
+            <a:ext cx="11274552" cy="1478280"/>
           </a:xfrm>
           <a:prstGeom prst="roundRect">
             <a:avLst>
-              <a:gd name="adj" fmla="val 3429"/>
+              <a:gd name="adj" fmla="val 3711"/>
             </a:avLst>
           </a:prstGeom>
           <a:solidFill>
@@ -9251,8 +9309,8 @@
         </p:nvSpPr>
         <p:spPr>
           <a:xfrm>
-            <a:off x="457200" y="1572768"/>
-            <a:ext cx="502920" cy="1600200"/>
+            <a:off x="457200" y="1645920"/>
+            <a:ext cx="502920" cy="1478280"/>
           </a:xfrm>
           <a:prstGeom prst="rect">
             <a:avLst/>
@@ -9271,8 +9329,8 @@
         </p:nvSpPr>
         <p:spPr>
           <a:xfrm>
-            <a:off x="457200" y="1572768"/>
-            <a:ext cx="502920" cy="1600200"/>
+            <a:off x="457200" y="1645920"/>
+            <a:ext cx="502920" cy="1478280"/>
           </a:xfrm>
           <a:prstGeom prst="rect">
             <a:avLst/>
@@ -9310,7 +9368,7 @@
         </p:nvSpPr>
         <p:spPr>
           <a:xfrm>
-            <a:off x="1143000" y="1682496"/>
+            <a:off x="1143000" y="1755648"/>
             <a:ext cx="8988552" cy="320040"/>
           </a:xfrm>
           <a:prstGeom prst="rect">
@@ -9349,8 +9407,8 @@
         </p:nvSpPr>
         <p:spPr>
           <a:xfrm>
-            <a:off x="1143000" y="2029968"/>
-            <a:ext cx="8988552" cy="1051560"/>
+            <a:off x="1143000" y="2103120"/>
+            <a:ext cx="8988552" cy="929640"/>
           </a:xfrm>
           <a:prstGeom prst="rect">
             <a:avLst/>
@@ -9388,7 +9446,7 @@
         </p:nvSpPr>
         <p:spPr>
           <a:xfrm>
-            <a:off x="10314432" y="1984248"/>
+            <a:off x="10314432" y="1996440"/>
             <a:ext cx="1280160" cy="777240"/>
           </a:xfrm>
           <a:prstGeom prst="roundRect">
@@ -9415,7 +9473,7 @@
         </p:nvSpPr>
         <p:spPr>
           <a:xfrm>
-            <a:off x="10314432" y="2029968"/>
+            <a:off x="10314432" y="2042160"/>
             <a:ext cx="1280160" cy="256032"/>
           </a:xfrm>
           <a:prstGeom prst="rect">
@@ -9454,7 +9512,7 @@
         </p:nvSpPr>
         <p:spPr>
           <a:xfrm>
-            <a:off x="10314432" y="2258568"/>
+            <a:off x="10314432" y="2270760"/>
             <a:ext cx="1280160" cy="457200"/>
           </a:xfrm>
           <a:prstGeom prst="rect">
@@ -9493,12 +9551,12 @@
         </p:nvSpPr>
         <p:spPr>
           <a:xfrm>
-            <a:off x="457200" y="3310128"/>
-            <a:ext cx="11274552" cy="1600200"/>
+            <a:off x="457200" y="3261360"/>
+            <a:ext cx="11274552" cy="1478280"/>
           </a:xfrm>
           <a:prstGeom prst="roundRect">
             <a:avLst>
-              <a:gd name="adj" fmla="val 3429"/>
+              <a:gd name="adj" fmla="val 3711"/>
             </a:avLst>
           </a:prstGeom>
           <a:solidFill>
@@ -9520,8 +9578,8 @@
         </p:nvSpPr>
         <p:spPr>
           <a:xfrm>
-            <a:off x="457200" y="3310128"/>
-            <a:ext cx="502920" cy="1600200"/>
+            <a:off x="457200" y="3261360"/>
+            <a:ext cx="502920" cy="1478280"/>
           </a:xfrm>
           <a:prstGeom prst="rect">
             <a:avLst/>
@@ -9540,8 +9598,8 @@
         </p:nvSpPr>
         <p:spPr>
           <a:xfrm>
-            <a:off x="457200" y="3310128"/>
-            <a:ext cx="502920" cy="1600200"/>
+            <a:off x="457200" y="3261360"/>
+            <a:ext cx="502920" cy="1478280"/>
           </a:xfrm>
           <a:prstGeom prst="rect">
             <a:avLst/>
@@ -9579,7 +9637,7 @@
         </p:nvSpPr>
         <p:spPr>
           <a:xfrm>
-            <a:off x="1143000" y="3419856"/>
+            <a:off x="1143000" y="3371088"/>
             <a:ext cx="8988552" cy="320040"/>
           </a:xfrm>
           <a:prstGeom prst="rect">
@@ -9618,8 +9676,8 @@
         </p:nvSpPr>
         <p:spPr>
           <a:xfrm>
-            <a:off x="1143000" y="3767328"/>
-            <a:ext cx="8988552" cy="1051560"/>
+            <a:off x="1143000" y="3718560"/>
+            <a:ext cx="8988552" cy="929640"/>
           </a:xfrm>
           <a:prstGeom prst="rect">
             <a:avLst/>
@@ -9657,7 +9715,7 @@
         </p:nvSpPr>
         <p:spPr>
           <a:xfrm>
-            <a:off x="10314432" y="3721608"/>
+            <a:off x="10314432" y="3611880"/>
             <a:ext cx="1280160" cy="777240"/>
           </a:xfrm>
           <a:prstGeom prst="roundRect">
@@ -9684,7 +9742,7 @@
         </p:nvSpPr>
         <p:spPr>
           <a:xfrm>
-            <a:off x="10314432" y="3767328"/>
+            <a:off x="10314432" y="3657600"/>
             <a:ext cx="1280160" cy="256032"/>
           </a:xfrm>
           <a:prstGeom prst="rect">
@@ -9723,7 +9781,7 @@
         </p:nvSpPr>
         <p:spPr>
           <a:xfrm>
-            <a:off x="10314432" y="3995928"/>
+            <a:off x="10314432" y="3886200"/>
             <a:ext cx="1280160" cy="457200"/>
           </a:xfrm>
           <a:prstGeom prst="rect">
@@ -9762,12 +9820,12 @@
         </p:nvSpPr>
         <p:spPr>
           <a:xfrm>
-            <a:off x="457200" y="5047488"/>
-            <a:ext cx="11274552" cy="1600200"/>
+            <a:off x="457200" y="4876800"/>
+            <a:ext cx="11274552" cy="1478280"/>
           </a:xfrm>
           <a:prstGeom prst="roundRect">
             <a:avLst>
-              <a:gd name="adj" fmla="val 3429"/>
+              <a:gd name="adj" fmla="val 3711"/>
             </a:avLst>
           </a:prstGeom>
           <a:solidFill>
@@ -9789,8 +9847,8 @@
         </p:nvSpPr>
         <p:spPr>
           <a:xfrm>
-            <a:off x="457200" y="5047488"/>
-            <a:ext cx="502920" cy="1600200"/>
+            <a:off x="457200" y="4876800"/>
+            <a:ext cx="502920" cy="1478280"/>
           </a:xfrm>
           <a:prstGeom prst="rect">
             <a:avLst/>
@@ -9809,8 +9867,8 @@
         </p:nvSpPr>
         <p:spPr>
           <a:xfrm>
-            <a:off x="457200" y="5047488"/>
-            <a:ext cx="502920" cy="1600200"/>
+            <a:off x="457200" y="4876800"/>
+            <a:ext cx="502920" cy="1478280"/>
           </a:xfrm>
           <a:prstGeom prst="rect">
             <a:avLst/>
@@ -9848,7 +9906,7 @@
         </p:nvSpPr>
         <p:spPr>
           <a:xfrm>
-            <a:off x="1143000" y="5157216"/>
+            <a:off x="1143000" y="4986528"/>
             <a:ext cx="8988552" cy="320040"/>
           </a:xfrm>
           <a:prstGeom prst="rect">
@@ -9887,8 +9945,8 @@
         </p:nvSpPr>
         <p:spPr>
           <a:xfrm>
-            <a:off x="1143000" y="5504688"/>
-            <a:ext cx="8988552" cy="1051560"/>
+            <a:off x="1143000" y="5334000"/>
+            <a:ext cx="8988552" cy="929640"/>
           </a:xfrm>
           <a:prstGeom prst="rect">
             <a:avLst/>
@@ -9926,7 +9984,7 @@
         </p:nvSpPr>
         <p:spPr>
           <a:xfrm>
-            <a:off x="10314432" y="5458968"/>
+            <a:off x="10314432" y="5227320"/>
             <a:ext cx="1280160" cy="777240"/>
           </a:xfrm>
           <a:prstGeom prst="roundRect">
@@ -9953,7 +10011,7 @@
         </p:nvSpPr>
         <p:spPr>
           <a:xfrm>
-            <a:off x="10314432" y="5504688"/>
+            <a:off x="10314432" y="5273040"/>
             <a:ext cx="1280160" cy="256032"/>
           </a:xfrm>
           <a:prstGeom prst="rect">
@@ -9992,7 +10050,7 @@
         </p:nvSpPr>
         <p:spPr>
           <a:xfrm>
-            <a:off x="10314432" y="5733288"/>
+            <a:off x="10314432" y="5501640"/>
             <a:ext cx="1280160" cy="457200"/>
           </a:xfrm>
           <a:prstGeom prst="rect">
@@ -10156,7 +10214,7 @@
               <a:buNone/>
             </a:pPr>
             <a:r>
-              <a:rPr lang="en-US" sz="2600" b="1" dirty="0">
+              <a:rPr lang="en-US" sz="2000" b="1" dirty="0">
                 <a:solidFill>
                   <a:srgbClr val="F38020"/>
                 </a:solidFill>
@@ -10170,7 +10228,7 @@
               <a:buNone/>
             </a:pPr>
             <a:r>
-              <a:rPr lang="en-US" sz="2600" b="1" dirty="0">
+              <a:rPr lang="en-US" sz="2000" b="1" dirty="0">
                 <a:solidFill>
                   <a:srgbClr val="B0B0B0"/>
                 </a:solidFill>
@@ -10184,7 +10242,7 @@
               <a:buNone/>
             </a:pPr>
             <a:r>
-              <a:rPr lang="en-US" sz="2600" b="1" dirty="0">
+              <a:rPr lang="en-US" sz="2000" b="1" dirty="0">
                 <a:solidFill>
                   <a:srgbClr val="1A1A1A"/>
                 </a:solidFill>
@@ -10194,7 +10252,7 @@
               </a:rPr>
               <a:t>Cloudflare AI Gateway — 一行 URL 修改解決三大痛點</a:t>
             </a:r>
-            <a:endParaRPr lang="en-US" sz="2600" dirty="0"/>
+            <a:endParaRPr lang="en-US" sz="2000" dirty="0"/>
           </a:p>
         </p:txBody>
       </p:sp>
@@ -10206,8 +10264,8 @@
         </p:nvSpPr>
         <p:spPr>
           <a:xfrm>
-            <a:off x="457200" y="886968"/>
-            <a:ext cx="8686800" cy="137160"/>
+            <a:off x="457200" y="1042416"/>
+            <a:ext cx="8046720" cy="109728"/>
           </a:xfrm>
           <a:prstGeom prst="rect">
             <a:avLst/>
@@ -10228,8 +10286,8 @@
         </p:nvSpPr>
         <p:spPr>
           <a:xfrm>
-            <a:off x="457200" y="1097280"/>
-            <a:ext cx="8686800" cy="320040"/>
+            <a:off x="457200" y="1225296"/>
+            <a:ext cx="8686800" cy="292608"/>
           </a:xfrm>
           <a:prstGeom prst="rect">
             <a:avLst/>
@@ -11789,7 +11847,7 @@
               <a:buNone/>
             </a:pPr>
             <a:r>
-              <a:rPr lang="en-US" sz="2600" b="1" dirty="0">
+              <a:rPr lang="en-US" sz="2000" b="1" dirty="0">
                 <a:solidFill>
                   <a:srgbClr val="F38020"/>
                 </a:solidFill>
@@ -11803,7 +11861,7 @@
               <a:buNone/>
             </a:pPr>
             <a:r>
-              <a:rPr lang="en-US" sz="2600" b="1" dirty="0">
+              <a:rPr lang="en-US" sz="2000" b="1" dirty="0">
                 <a:solidFill>
                   <a:srgbClr val="B0B0B0"/>
                 </a:solidFill>
@@ -11817,7 +11875,7 @@
               <a:buNone/>
             </a:pPr>
             <a:r>
-              <a:rPr lang="en-US" sz="2600" b="1" dirty="0">
+              <a:rPr lang="en-US" sz="2000" b="1" dirty="0">
                 <a:solidFill>
                   <a:srgbClr val="1A1A1A"/>
                 </a:solidFill>
@@ -11827,7 +11885,7 @@
               </a:rPr>
               <a:t>BYOK 機制 — 為什麼 API Key 不會進 Worker？</a:t>
             </a:r>
-            <a:endParaRPr lang="en-US" sz="2600" dirty="0"/>
+            <a:endParaRPr lang="en-US" sz="2000" dirty="0"/>
           </a:p>
         </p:txBody>
       </p:sp>
@@ -11839,8 +11897,8 @@
         </p:nvSpPr>
         <p:spPr>
           <a:xfrm>
-            <a:off x="457200" y="886968"/>
-            <a:ext cx="7242048" cy="137160"/>
+            <a:off x="457200" y="1042416"/>
+            <a:ext cx="6382512" cy="109728"/>
           </a:xfrm>
           <a:prstGeom prst="rect">
             <a:avLst/>
@@ -11861,8 +11919,8 @@
         </p:nvSpPr>
         <p:spPr>
           <a:xfrm>
-            <a:off x="457200" y="1097280"/>
-            <a:ext cx="8686800" cy="320040"/>
+            <a:off x="457200" y="1225296"/>
+            <a:ext cx="8686800" cy="292608"/>
           </a:xfrm>
           <a:prstGeom prst="rect">
             <a:avLst/>
@@ -11939,8 +11997,8 @@
         </p:nvSpPr>
         <p:spPr>
           <a:xfrm>
-            <a:off x="457200" y="1508760"/>
-            <a:ext cx="5376672" cy="5074920"/>
+            <a:off x="457200" y="1645920"/>
+            <a:ext cx="5376672" cy="4709160"/>
           </a:xfrm>
           <a:prstGeom prst="rect">
             <a:avLst/>
@@ -11964,7 +12022,7 @@
         </p:nvSpPr>
         <p:spPr>
           <a:xfrm>
-            <a:off x="457200" y="1508760"/>
+            <a:off x="457200" y="1645920"/>
             <a:ext cx="5376672" cy="64008"/>
           </a:xfrm>
           <a:prstGeom prst="rect">
@@ -11984,7 +12042,7 @@
         </p:nvSpPr>
         <p:spPr>
           <a:xfrm>
-            <a:off x="640080" y="1618488"/>
+            <a:off x="640080" y="1755648"/>
             <a:ext cx="5102352" cy="384048"/>
           </a:xfrm>
           <a:prstGeom prst="rect">
@@ -12023,7 +12081,7 @@
         </p:nvSpPr>
         <p:spPr>
           <a:xfrm>
-            <a:off x="640080" y="2011680"/>
+            <a:off x="640080" y="2148840"/>
             <a:ext cx="5102352" cy="292608"/>
           </a:xfrm>
           <a:prstGeom prst="rect">
@@ -12062,7 +12120,7 @@
         </p:nvSpPr>
         <p:spPr>
           <a:xfrm>
-            <a:off x="594360" y="2377440"/>
+            <a:off x="594360" y="2514600"/>
             <a:ext cx="5102352" cy="512064"/>
           </a:xfrm>
           <a:prstGeom prst="rect">
@@ -12101,7 +12159,7 @@
         </p:nvSpPr>
         <p:spPr>
           <a:xfrm>
-            <a:off x="594360" y="2944368"/>
+            <a:off x="594360" y="3081528"/>
             <a:ext cx="5102352" cy="512064"/>
           </a:xfrm>
           <a:prstGeom prst="rect">
@@ -12140,7 +12198,7 @@
         </p:nvSpPr>
         <p:spPr>
           <a:xfrm>
-            <a:off x="594360" y="3511296"/>
+            <a:off x="594360" y="3648456"/>
             <a:ext cx="5102352" cy="512064"/>
           </a:xfrm>
           <a:prstGeom prst="rect">
@@ -12179,7 +12237,7 @@
         </p:nvSpPr>
         <p:spPr>
           <a:xfrm>
-            <a:off x="594360" y="4078224"/>
+            <a:off x="594360" y="4215384"/>
             <a:ext cx="5102352" cy="512064"/>
           </a:xfrm>
           <a:prstGeom prst="rect">
@@ -12218,7 +12276,7 @@
         </p:nvSpPr>
         <p:spPr>
           <a:xfrm>
-            <a:off x="594360" y="4645152"/>
+            <a:off x="594360" y="4782312"/>
             <a:ext cx="5102352" cy="512064"/>
           </a:xfrm>
           <a:prstGeom prst="rect">
@@ -12257,7 +12315,7 @@
         </p:nvSpPr>
         <p:spPr>
           <a:xfrm>
-            <a:off x="502920" y="5486400"/>
+            <a:off x="502920" y="5257800"/>
             <a:ext cx="5239512" cy="420624"/>
           </a:xfrm>
           <a:prstGeom prst="rect">
@@ -12277,7 +12335,7 @@
         </p:nvSpPr>
         <p:spPr>
           <a:xfrm>
-            <a:off x="640080" y="5486400"/>
+            <a:off x="640080" y="5257800"/>
             <a:ext cx="5102352" cy="420624"/>
           </a:xfrm>
           <a:prstGeom prst="rect">
@@ -12316,7 +12374,7 @@
         </p:nvSpPr>
         <p:spPr>
           <a:xfrm>
-            <a:off x="502920" y="5961888"/>
+            <a:off x="502920" y="5733288"/>
             <a:ext cx="5239512" cy="420624"/>
           </a:xfrm>
           <a:prstGeom prst="rect">
@@ -12336,7 +12394,7 @@
         </p:nvSpPr>
         <p:spPr>
           <a:xfrm>
-            <a:off x="640080" y="5961888"/>
+            <a:off x="640080" y="5733288"/>
             <a:ext cx="5102352" cy="420624"/>
           </a:xfrm>
           <a:prstGeom prst="rect">
@@ -12375,7 +12433,7 @@
         </p:nvSpPr>
         <p:spPr>
           <a:xfrm rot="5400000">
-            <a:off x="5897880" y="3790188"/>
+            <a:off x="5897880" y="3744468"/>
             <a:ext cx="457200" cy="384048"/>
           </a:xfrm>
           <a:prstGeom prst="triangle">
@@ -12395,8 +12453,8 @@
         </p:nvSpPr>
         <p:spPr>
           <a:xfrm>
-            <a:off x="6446520" y="1508760"/>
-            <a:ext cx="5376672" cy="5074920"/>
+            <a:off x="6446520" y="1645920"/>
+            <a:ext cx="5376672" cy="4709160"/>
           </a:xfrm>
           <a:prstGeom prst="rect">
             <a:avLst/>
@@ -12420,7 +12478,7 @@
         </p:nvSpPr>
         <p:spPr>
           <a:xfrm>
-            <a:off x="6446520" y="1508760"/>
+            <a:off x="6446520" y="1645920"/>
             <a:ext cx="5376672" cy="64008"/>
           </a:xfrm>
           <a:prstGeom prst="rect">
@@ -12440,7 +12498,7 @@
         </p:nvSpPr>
         <p:spPr>
           <a:xfrm>
-            <a:off x="6629400" y="1618488"/>
+            <a:off x="6629400" y="1755648"/>
             <a:ext cx="5102352" cy="384048"/>
           </a:xfrm>
           <a:prstGeom prst="rect">
@@ -12479,7 +12537,7 @@
         </p:nvSpPr>
         <p:spPr>
           <a:xfrm>
-            <a:off x="6629400" y="2011680"/>
+            <a:off x="6629400" y="2148840"/>
             <a:ext cx="5102352" cy="292608"/>
           </a:xfrm>
           <a:prstGeom prst="rect">
@@ -12518,7 +12576,7 @@
         </p:nvSpPr>
         <p:spPr>
           <a:xfrm>
-            <a:off x="6583680" y="2377440"/>
+            <a:off x="6583680" y="2514600"/>
             <a:ext cx="5102352" cy="512064"/>
           </a:xfrm>
           <a:prstGeom prst="rect">
@@ -12557,7 +12615,7 @@
         </p:nvSpPr>
         <p:spPr>
           <a:xfrm>
-            <a:off x="6583680" y="2944368"/>
+            <a:off x="6583680" y="3081528"/>
             <a:ext cx="5102352" cy="512064"/>
           </a:xfrm>
           <a:prstGeom prst="rect">
@@ -12596,7 +12654,7 @@
         </p:nvSpPr>
         <p:spPr>
           <a:xfrm>
-            <a:off x="6583680" y="3511296"/>
+            <a:off x="6583680" y="3648456"/>
             <a:ext cx="5102352" cy="512064"/>
           </a:xfrm>
           <a:prstGeom prst="rect">
@@ -12635,7 +12693,7 @@
         </p:nvSpPr>
         <p:spPr>
           <a:xfrm>
-            <a:off x="6583680" y="4078224"/>
+            <a:off x="6583680" y="4215384"/>
             <a:ext cx="5102352" cy="512064"/>
           </a:xfrm>
           <a:prstGeom prst="rect">
@@ -12674,7 +12732,7 @@
         </p:nvSpPr>
         <p:spPr>
           <a:xfrm>
-            <a:off x="6583680" y="4645152"/>
+            <a:off x="6583680" y="4782312"/>
             <a:ext cx="5102352" cy="512064"/>
           </a:xfrm>
           <a:prstGeom prst="rect">
@@ -12713,7 +12771,7 @@
         </p:nvSpPr>
         <p:spPr>
           <a:xfrm>
-            <a:off x="6492240" y="5486400"/>
+            <a:off x="6492240" y="5257800"/>
             <a:ext cx="5239512" cy="420624"/>
           </a:xfrm>
           <a:prstGeom prst="rect">
@@ -12733,7 +12791,7 @@
         </p:nvSpPr>
         <p:spPr>
           <a:xfrm>
-            <a:off x="6629400" y="5486400"/>
+            <a:off x="6629400" y="5257800"/>
             <a:ext cx="5102352" cy="420624"/>
           </a:xfrm>
           <a:prstGeom prst="rect">
@@ -12772,7 +12830,7 @@
         </p:nvSpPr>
         <p:spPr>
           <a:xfrm>
-            <a:off x="6492240" y="5961888"/>
+            <a:off x="6492240" y="5733288"/>
             <a:ext cx="5239512" cy="420624"/>
           </a:xfrm>
           <a:prstGeom prst="rect">
@@ -12792,7 +12850,7 @@
         </p:nvSpPr>
         <p:spPr>
           <a:xfrm>
-            <a:off x="6629400" y="5961888"/>
+            <a:off x="6629400" y="5733288"/>
             <a:ext cx="5102352" cy="420624"/>
           </a:xfrm>
           <a:prstGeom prst="rect">
@@ -13164,7 +13222,7 @@
               <a:buNone/>
             </a:pPr>
             <a:r>
-              <a:rPr lang="en-US" sz="2600" b="1" dirty="0">
+              <a:rPr lang="en-US" sz="2000" b="1" dirty="0">
                 <a:solidFill>
                   <a:srgbClr val="F38020"/>
                 </a:solidFill>
@@ -13178,7 +13236,7 @@
               <a:buNone/>
             </a:pPr>
             <a:r>
-              <a:rPr lang="en-US" sz="2600" b="1" dirty="0">
+              <a:rPr lang="en-US" sz="2000" b="1" dirty="0">
                 <a:solidFill>
                   <a:srgbClr val="B0B0B0"/>
                 </a:solidFill>
@@ -13192,7 +13250,7 @@
               <a:buNone/>
             </a:pPr>
             <a:r>
-              <a:rPr lang="en-US" sz="2600" b="1" dirty="0">
+              <a:rPr lang="en-US" sz="2000" b="1" dirty="0">
                 <a:solidFill>
                   <a:srgbClr val="1A1A1A"/>
                 </a:solidFill>
@@ -13202,7 +13260,7 @@
               </a:rPr>
               <a:t>整體架構：1 Worker + D1 + KV + AI Gateway + MCP</a:t>
             </a:r>
-            <a:endParaRPr lang="en-US" sz="2600" dirty="0"/>
+            <a:endParaRPr lang="en-US" sz="2000" dirty="0"/>
           </a:p>
         </p:txBody>
       </p:sp>
@@ -13214,8 +13272,8 @@
         </p:nvSpPr>
         <p:spPr>
           <a:xfrm>
-            <a:off x="457200" y="886968"/>
-            <a:ext cx="8266176" cy="137160"/>
+            <a:off x="457200" y="1042416"/>
+            <a:ext cx="7278624" cy="109728"/>
           </a:xfrm>
           <a:prstGeom prst="rect">
             <a:avLst/>
@@ -13236,8 +13294,8 @@
         </p:nvSpPr>
         <p:spPr>
           <a:xfrm>
-            <a:off x="457200" y="1097280"/>
-            <a:ext cx="8686800" cy="320040"/>
+            <a:off x="457200" y="1225296"/>
+            <a:ext cx="8686800" cy="292608"/>
           </a:xfrm>
           <a:prstGeom prst="rect">
             <a:avLst/>
@@ -14086,7 +14144,7 @@
               <a:buNone/>
             </a:pPr>
             <a:r>
-              <a:rPr lang="en-US" sz="2600" b="1" dirty="0">
+              <a:rPr lang="en-US" sz="2000" b="1" dirty="0">
                 <a:solidFill>
                   <a:srgbClr val="F38020"/>
                 </a:solidFill>
@@ -14100,7 +14158,7 @@
               <a:buNone/>
             </a:pPr>
             <a:r>
-              <a:rPr lang="en-US" sz="2600" b="1" dirty="0">
+              <a:rPr lang="en-US" sz="2000" b="1" dirty="0">
                 <a:solidFill>
                   <a:srgbClr val="B0B0B0"/>
                 </a:solidFill>
@@ -14114,7 +14172,7 @@
               <a:buNone/>
             </a:pPr>
             <a:r>
-              <a:rPr lang="en-US" sz="2600" b="1" dirty="0">
+              <a:rPr lang="en-US" sz="2000" b="1" dirty="0">
                 <a:solidFill>
                   <a:srgbClr val="1A1A1A"/>
                 </a:solidFill>
@@ -14124,7 +14182,7 @@
               </a:rPr>
               <a:t>Worker 8 支 src — 每個檔案做什麼</a:t>
             </a:r>
-            <a:endParaRPr lang="en-US" sz="2600" dirty="0"/>
+            <a:endParaRPr lang="en-US" sz="2000" dirty="0"/>
           </a:p>
         </p:txBody>
       </p:sp>
@@ -14136,8 +14194,8 @@
         </p:nvSpPr>
         <p:spPr>
           <a:xfrm>
-            <a:off x="457200" y="886968"/>
-            <a:ext cx="6217920" cy="137160"/>
+            <a:off x="457200" y="1042416"/>
+            <a:ext cx="5486400" cy="109728"/>
           </a:xfrm>
           <a:prstGeom prst="rect">
             <a:avLst/>
@@ -14158,8 +14216,8 @@
         </p:nvSpPr>
         <p:spPr>
           <a:xfrm>
-            <a:off x="457200" y="1097280"/>
-            <a:ext cx="8686800" cy="320040"/>
+            <a:off x="457200" y="1225296"/>
+            <a:ext cx="8686800" cy="292608"/>
           </a:xfrm>
           <a:prstGeom prst="rect">
             <a:avLst/>
@@ -16006,7 +16064,7 @@
               <a:buNone/>
             </a:pPr>
             <a:r>
-              <a:rPr lang="en-US" sz="2600" b="1" dirty="0">
+              <a:rPr lang="en-US" sz="2000" b="1" dirty="0">
                 <a:solidFill>
                   <a:srgbClr val="F38020"/>
                 </a:solidFill>
@@ -16020,7 +16078,7 @@
               <a:buNone/>
             </a:pPr>
             <a:r>
-              <a:rPr lang="en-US" sz="2600" b="1" dirty="0">
+              <a:rPr lang="en-US" sz="2000" b="1" dirty="0">
                 <a:solidFill>
                   <a:srgbClr val="B0B0B0"/>
                 </a:solidFill>
@@ -16034,7 +16092,7 @@
               <a:buNone/>
             </a:pPr>
             <a:r>
-              <a:rPr lang="en-US" sz="2600" b="1" dirty="0">
+              <a:rPr lang="en-US" sz="2000" b="1" dirty="0">
                 <a:solidFill>
                   <a:srgbClr val="1A1A1A"/>
                 </a:solidFill>
@@ -16044,7 +16102,7 @@
               </a:rPr>
               <a:t>chat.ts 關鍵段：BYOK header 三明治</a:t>
             </a:r>
-            <a:endParaRPr lang="en-US" sz="2600" dirty="0"/>
+            <a:endParaRPr lang="en-US" sz="2000" dirty="0"/>
           </a:p>
         </p:txBody>
       </p:sp>
@@ -16056,8 +16114,8 @@
         </p:nvSpPr>
         <p:spPr>
           <a:xfrm>
-            <a:off x="457200" y="886968"/>
-            <a:ext cx="6656832" cy="137160"/>
+            <a:off x="457200" y="1042416"/>
+            <a:ext cx="5870448" cy="109728"/>
           </a:xfrm>
           <a:prstGeom prst="rect">
             <a:avLst/>
@@ -16078,8 +16136,8 @@
         </p:nvSpPr>
         <p:spPr>
           <a:xfrm>
-            <a:off x="457200" y="1097280"/>
-            <a:ext cx="8686800" cy="320040"/>
+            <a:off x="457200" y="1225296"/>
+            <a:ext cx="8686800" cy="292608"/>
           </a:xfrm>
           <a:prstGeom prst="rect">
             <a:avLst/>
